--- a/.lessons/22 Fundamental MIddleware/4 Group Middleware/1.pptx
+++ b/.lessons/22 Fundamental MIddleware/4 Group Middleware/1.pptx
@@ -7,7 +7,16 @@
   <p:sldIdLst>
     <p:sldId id="402" r:id="rId2"/>
     <p:sldId id="403" r:id="rId3"/>
-    <p:sldId id="400" r:id="rId4"/>
+    <p:sldId id="405" r:id="rId4"/>
+    <p:sldId id="404" r:id="rId5"/>
+    <p:sldId id="406" r:id="rId6"/>
+    <p:sldId id="407" r:id="rId7"/>
+    <p:sldId id="400" r:id="rId8"/>
+    <p:sldId id="408" r:id="rId9"/>
+    <p:sldId id="409" r:id="rId10"/>
+    <p:sldId id="411" r:id="rId11"/>
+    <p:sldId id="412" r:id="rId12"/>
+    <p:sldId id="410" r:id="rId13"/>
   </p:sldIdLst>
   <p:sldSz cx="12192000" cy="6858000"/>
   <p:notesSz cx="6858000" cy="9144000"/>
@@ -3369,6 +3378,149 @@
               <a:buNone/>
             </a:pPr>
             <a:r>
+              <a:rPr lang="az-Latn-AZ" altLang="en-US" sz="1300">
+                <a:latin typeface="Arial" panose="020B0604020202020204" pitchFamily="34" charset="0"/>
+              </a:rPr>
+              <a:t>Bu dərsə başlamadan əvvəl </a:t>
+            </a:r>
+            <a:r>
+              <a:rPr lang="az-Latn-AZ" altLang="en-US" sz="1300" b="1">
+                <a:latin typeface="Arial" panose="020B0604020202020204" pitchFamily="34" charset="0"/>
+              </a:rPr>
+              <a:t>CheckCountry</a:t>
+            </a:r>
+            <a:r>
+              <a:rPr lang="az-Latn-AZ" altLang="en-US" sz="1300">
+                <a:latin typeface="Arial" panose="020B0604020202020204" pitchFamily="34" charset="0"/>
+              </a:rPr>
+              <a:t> </a:t>
+            </a:r>
+            <a:r>
+              <a:rPr lang="en-US" altLang="en-US" sz="1300">
+                <a:latin typeface="Arial" panose="020B0604020202020204" pitchFamily="34" charset="0"/>
+              </a:rPr>
+              <a:t>middleware -</a:t>
+            </a:r>
+            <a:r>
+              <a:rPr lang="az-Latn-AZ" altLang="en-US" sz="1300">
+                <a:latin typeface="Arial" panose="020B0604020202020204" pitchFamily="34" charset="0"/>
+              </a:rPr>
+              <a:t>ni, commentə alırıq. Yəni qapadırıq lazım olmadığı üçün. </a:t>
+            </a:r>
+            <a:endParaRPr kumimoji="0" lang="en-US" altLang="en-US" sz="1300" b="0" i="0" u="none" strike="noStrike" cap="none" normalizeH="0" baseline="0">
+              <a:ln>
+                <a:noFill/>
+              </a:ln>
+              <a:solidFill>
+                <a:schemeClr val="tx1"/>
+              </a:solidFill>
+              <a:effectLst/>
+              <a:latin typeface="Arial" panose="020B0604020202020204" pitchFamily="34" charset="0"/>
+            </a:endParaRPr>
+          </a:p>
+        </p:txBody>
+      </p:sp>
+      <p:pic>
+        <p:nvPicPr>
+          <p:cNvPr id="4" name="Picture 3">
+            <a:extLst>
+              <a:ext uri="{FF2B5EF4-FFF2-40B4-BE49-F238E27FC236}">
+                <a16:creationId xmlns:a16="http://schemas.microsoft.com/office/drawing/2014/main" id="{65B08486-654D-7F32-9BD2-298E7B282A8C}"/>
+              </a:ext>
+            </a:extLst>
+          </p:cNvPr>
+          <p:cNvPicPr>
+            <a:picLocks noChangeAspect="1"/>
+          </p:cNvPicPr>
+          <p:nvPr/>
+        </p:nvPicPr>
+        <p:blipFill>
+          <a:blip r:embed="rId2"/>
+          <a:stretch>
+            <a:fillRect/>
+          </a:stretch>
+        </p:blipFill>
+        <p:spPr>
+          <a:xfrm>
+            <a:off x="5012646" y="1225485"/>
+            <a:ext cx="7179354" cy="5632515"/>
+          </a:xfrm>
+          <a:prstGeom prst="rect">
+            <a:avLst/>
+          </a:prstGeom>
+        </p:spPr>
+      </p:pic>
+    </p:spTree>
+    <p:extLst>
+      <p:ext uri="{BB962C8B-B14F-4D97-AF65-F5344CB8AC3E}">
+        <p14:creationId xmlns:p14="http://schemas.microsoft.com/office/powerpoint/2010/main" val="2486611332"/>
+      </p:ext>
+    </p:extLst>
+  </p:cSld>
+  <p:clrMapOvr>
+    <a:masterClrMapping/>
+  </p:clrMapOvr>
+</p:sld>
+</file>
+
+<file path=ppt/slides/slide10.xml><?xml version="1.0" encoding="utf-8"?>
+<p:sld xmlns:a="http://schemas.openxmlformats.org/drawingml/2006/main" xmlns:r="http://schemas.openxmlformats.org/officeDocument/2006/relationships" xmlns:p="http://schemas.openxmlformats.org/presentationml/2006/main">
+  <p:cSld>
+    <p:spTree>
+      <p:nvGrpSpPr>
+        <p:cNvPr id="1" name="">
+          <a:extLst>
+            <a:ext uri="{FF2B5EF4-FFF2-40B4-BE49-F238E27FC236}">
+              <a16:creationId xmlns:a16="http://schemas.microsoft.com/office/drawing/2014/main" id="{A8A39D31-8AE5-9C86-BE9D-E731E9F440BB}"/>
+            </a:ext>
+          </a:extLst>
+        </p:cNvPr>
+        <p:cNvGrpSpPr/>
+        <p:nvPr/>
+      </p:nvGrpSpPr>
+      <p:grpSpPr>
+        <a:xfrm>
+          <a:off x="0" y="0"/>
+          <a:ext cx="0" cy="0"/>
+          <a:chOff x="0" y="0"/>
+          <a:chExt cx="0" cy="0"/>
+        </a:xfrm>
+      </p:grpSpPr>
+      <p:sp>
+        <p:nvSpPr>
+          <p:cNvPr id="3" name="TextBox 2">
+            <a:extLst>
+              <a:ext uri="{FF2B5EF4-FFF2-40B4-BE49-F238E27FC236}">
+                <a16:creationId xmlns:a16="http://schemas.microsoft.com/office/drawing/2014/main" id="{8DD6ABA2-1D5D-1107-B48F-9BE95064BB0D}"/>
+              </a:ext>
+            </a:extLst>
+          </p:cNvPr>
+          <p:cNvSpPr txBox="1"/>
+          <p:nvPr/>
+        </p:nvSpPr>
+        <p:spPr>
+          <a:xfrm>
+            <a:off x="217714" y="255046"/>
+            <a:ext cx="11756571" cy="355354"/>
+          </a:xfrm>
+          <a:prstGeom prst="rect">
+            <a:avLst/>
+          </a:prstGeom>
+          <a:noFill/>
+        </p:spPr>
+        <p:txBody>
+          <a:bodyPr wrap="square">
+            <a:spAutoFit/>
+          </a:bodyPr>
+          <a:lstStyle/>
+          <a:p>
+            <a:pPr>
+              <a:lnSpc>
+                <a:spcPct val="150000"/>
+              </a:lnSpc>
+              <a:buNone/>
+            </a:pPr>
+            <a:r>
               <a:rPr kumimoji="0" lang="en-US" altLang="en-US" sz="1300" b="0" i="0" u="none" strike="noStrike" cap="none" normalizeH="0" baseline="0">
                 <a:ln>
                   <a:noFill/>
@@ -3387,7 +3539,179 @@
     </p:spTree>
     <p:extLst>
       <p:ext uri="{BB962C8B-B14F-4D97-AF65-F5344CB8AC3E}">
-        <p14:creationId xmlns:p14="http://schemas.microsoft.com/office/powerpoint/2010/main" val="2486611332"/>
+        <p14:creationId xmlns:p14="http://schemas.microsoft.com/office/powerpoint/2010/main" val="3283842240"/>
+      </p:ext>
+    </p:extLst>
+  </p:cSld>
+  <p:clrMapOvr>
+    <a:masterClrMapping/>
+  </p:clrMapOvr>
+</p:sld>
+</file>
+
+<file path=ppt/slides/slide11.xml><?xml version="1.0" encoding="utf-8"?>
+<p:sld xmlns:a="http://schemas.openxmlformats.org/drawingml/2006/main" xmlns:r="http://schemas.openxmlformats.org/officeDocument/2006/relationships" xmlns:p="http://schemas.openxmlformats.org/presentationml/2006/main">
+  <p:cSld>
+    <p:spTree>
+      <p:nvGrpSpPr>
+        <p:cNvPr id="1" name="">
+          <a:extLst>
+            <a:ext uri="{FF2B5EF4-FFF2-40B4-BE49-F238E27FC236}">
+              <a16:creationId xmlns:a16="http://schemas.microsoft.com/office/drawing/2014/main" id="{806E7B41-5D02-C15E-AB8F-B42870D60A3F}"/>
+            </a:ext>
+          </a:extLst>
+        </p:cNvPr>
+        <p:cNvGrpSpPr/>
+        <p:nvPr/>
+      </p:nvGrpSpPr>
+      <p:grpSpPr>
+        <a:xfrm>
+          <a:off x="0" y="0"/>
+          <a:ext cx="0" cy="0"/>
+          <a:chOff x="0" y="0"/>
+          <a:chExt cx="0" cy="0"/>
+        </a:xfrm>
+      </p:grpSpPr>
+      <p:sp>
+        <p:nvSpPr>
+          <p:cNvPr id="3" name="TextBox 2">
+            <a:extLst>
+              <a:ext uri="{FF2B5EF4-FFF2-40B4-BE49-F238E27FC236}">
+                <a16:creationId xmlns:a16="http://schemas.microsoft.com/office/drawing/2014/main" id="{6B1D7EC3-104A-CFE3-87AB-153EC0E8732D}"/>
+              </a:ext>
+            </a:extLst>
+          </p:cNvPr>
+          <p:cNvSpPr txBox="1"/>
+          <p:nvPr/>
+        </p:nvSpPr>
+        <p:spPr>
+          <a:xfrm>
+            <a:off x="217714" y="255046"/>
+            <a:ext cx="11756571" cy="355354"/>
+          </a:xfrm>
+          <a:prstGeom prst="rect">
+            <a:avLst/>
+          </a:prstGeom>
+          <a:noFill/>
+        </p:spPr>
+        <p:txBody>
+          <a:bodyPr wrap="square">
+            <a:spAutoFit/>
+          </a:bodyPr>
+          <a:lstStyle/>
+          <a:p>
+            <a:pPr>
+              <a:lnSpc>
+                <a:spcPct val="150000"/>
+              </a:lnSpc>
+              <a:buNone/>
+            </a:pPr>
+            <a:r>
+              <a:rPr kumimoji="0" lang="en-US" altLang="en-US" sz="1300" b="0" i="0" u="none" strike="noStrike" cap="none" normalizeH="0" baseline="0">
+                <a:ln>
+                  <a:noFill/>
+                </a:ln>
+                <a:solidFill>
+                  <a:schemeClr val="tx1"/>
+                </a:solidFill>
+                <a:effectLst/>
+                <a:latin typeface="Arial" panose="020B0604020202020204" pitchFamily="34" charset="0"/>
+              </a:rPr>
+              <a:t>.</a:t>
+            </a:r>
+          </a:p>
+        </p:txBody>
+      </p:sp>
+    </p:spTree>
+    <p:extLst>
+      <p:ext uri="{BB962C8B-B14F-4D97-AF65-F5344CB8AC3E}">
+        <p14:creationId xmlns:p14="http://schemas.microsoft.com/office/powerpoint/2010/main" val="1261367043"/>
+      </p:ext>
+    </p:extLst>
+  </p:cSld>
+  <p:clrMapOvr>
+    <a:masterClrMapping/>
+  </p:clrMapOvr>
+</p:sld>
+</file>
+
+<file path=ppt/slides/slide12.xml><?xml version="1.0" encoding="utf-8"?>
+<p:sld xmlns:a="http://schemas.openxmlformats.org/drawingml/2006/main" xmlns:r="http://schemas.openxmlformats.org/officeDocument/2006/relationships" xmlns:p="http://schemas.openxmlformats.org/presentationml/2006/main">
+  <p:cSld>
+    <p:spTree>
+      <p:nvGrpSpPr>
+        <p:cNvPr id="1" name="">
+          <a:extLst>
+            <a:ext uri="{FF2B5EF4-FFF2-40B4-BE49-F238E27FC236}">
+              <a16:creationId xmlns:a16="http://schemas.microsoft.com/office/drawing/2014/main" id="{6B9F637E-3C6D-657F-02E6-AE2BB6D274F3}"/>
+            </a:ext>
+          </a:extLst>
+        </p:cNvPr>
+        <p:cNvGrpSpPr/>
+        <p:nvPr/>
+      </p:nvGrpSpPr>
+      <p:grpSpPr>
+        <a:xfrm>
+          <a:off x="0" y="0"/>
+          <a:ext cx="0" cy="0"/>
+          <a:chOff x="0" y="0"/>
+          <a:chExt cx="0" cy="0"/>
+        </a:xfrm>
+      </p:grpSpPr>
+      <p:sp>
+        <p:nvSpPr>
+          <p:cNvPr id="3" name="TextBox 2">
+            <a:extLst>
+              <a:ext uri="{FF2B5EF4-FFF2-40B4-BE49-F238E27FC236}">
+                <a16:creationId xmlns:a16="http://schemas.microsoft.com/office/drawing/2014/main" id="{5F243A03-E140-C958-5F70-C10477DBBE90}"/>
+              </a:ext>
+            </a:extLst>
+          </p:cNvPr>
+          <p:cNvSpPr txBox="1"/>
+          <p:nvPr/>
+        </p:nvSpPr>
+        <p:spPr>
+          <a:xfrm>
+            <a:off x="217714" y="255046"/>
+            <a:ext cx="11756571" cy="355354"/>
+          </a:xfrm>
+          <a:prstGeom prst="rect">
+            <a:avLst/>
+          </a:prstGeom>
+          <a:noFill/>
+        </p:spPr>
+        <p:txBody>
+          <a:bodyPr wrap="square">
+            <a:spAutoFit/>
+          </a:bodyPr>
+          <a:lstStyle/>
+          <a:p>
+            <a:pPr>
+              <a:lnSpc>
+                <a:spcPct val="150000"/>
+              </a:lnSpc>
+              <a:buNone/>
+            </a:pPr>
+            <a:r>
+              <a:rPr kumimoji="0" lang="en-US" altLang="en-US" sz="1300" b="0" i="0" u="none" strike="noStrike" cap="none" normalizeH="0" baseline="0">
+                <a:ln>
+                  <a:noFill/>
+                </a:ln>
+                <a:solidFill>
+                  <a:schemeClr val="tx1"/>
+                </a:solidFill>
+                <a:effectLst/>
+                <a:latin typeface="Arial" panose="020B0604020202020204" pitchFamily="34" charset="0"/>
+              </a:rPr>
+              <a:t>.</a:t>
+            </a:r>
+          </a:p>
+        </p:txBody>
+      </p:sp>
+    </p:spTree>
+    <p:extLst>
+      <p:ext uri="{BB962C8B-B14F-4D97-AF65-F5344CB8AC3E}">
+        <p14:creationId xmlns:p14="http://schemas.microsoft.com/office/powerpoint/2010/main" val="847277065"/>
       </p:ext>
     </p:extLst>
   </p:cSld>
@@ -3420,12 +3744,42 @@
           <a:chExt cx="0" cy="0"/>
         </a:xfrm>
       </p:grpSpPr>
+      <p:pic>
+        <p:nvPicPr>
+          <p:cNvPr id="4" name="Picture 3">
+            <a:extLst>
+              <a:ext uri="{FF2B5EF4-FFF2-40B4-BE49-F238E27FC236}">
+                <a16:creationId xmlns:a16="http://schemas.microsoft.com/office/drawing/2014/main" id="{33BE4D55-1801-76E9-1B75-EFE07E680036}"/>
+              </a:ext>
+            </a:extLst>
+          </p:cNvPr>
+          <p:cNvPicPr>
+            <a:picLocks noChangeAspect="1"/>
+          </p:cNvPicPr>
+          <p:nvPr/>
+        </p:nvPicPr>
+        <p:blipFill>
+          <a:blip r:embed="rId2"/>
+          <a:stretch>
+            <a:fillRect/>
+          </a:stretch>
+        </p:blipFill>
+        <p:spPr>
+          <a:xfrm>
+            <a:off x="0" y="1544375"/>
+            <a:ext cx="12192000" cy="5313625"/>
+          </a:xfrm>
+          <a:prstGeom prst="rect">
+            <a:avLst/>
+          </a:prstGeom>
+        </p:spPr>
+      </p:pic>
       <p:sp>
         <p:nvSpPr>
-          <p:cNvPr id="3" name="TextBox 2">
-            <a:extLst>
-              <a:ext uri="{FF2B5EF4-FFF2-40B4-BE49-F238E27FC236}">
-                <a16:creationId xmlns:a16="http://schemas.microsoft.com/office/drawing/2014/main" id="{81782941-0DB4-B0DA-A36A-31CA5EC69992}"/>
+          <p:cNvPr id="5" name="TextBox 4">
+            <a:extLst>
+              <a:ext uri="{FF2B5EF4-FFF2-40B4-BE49-F238E27FC236}">
+                <a16:creationId xmlns:a16="http://schemas.microsoft.com/office/drawing/2014/main" id="{14729C23-7DD5-02B4-C302-9BA140B7D630}"/>
               </a:ext>
             </a:extLst>
           </p:cNvPr>
@@ -3455,18 +3809,21 @@
               <a:buNone/>
             </a:pPr>
             <a:r>
-              <a:rPr kumimoji="0" lang="en-US" altLang="en-US" sz="1300" b="0" i="0" u="none" strike="noStrike" cap="none" normalizeH="0" baseline="0">
-                <a:ln>
-                  <a:noFill/>
-                </a:ln>
-                <a:solidFill>
-                  <a:schemeClr val="tx1"/>
-                </a:solidFill>
-                <a:effectLst/>
-                <a:latin typeface="Arial" panose="020B0604020202020204" pitchFamily="34" charset="0"/>
-              </a:rPr>
-              <a:t>.</a:t>
-            </a:r>
+              <a:rPr lang="az-Latn-AZ" altLang="en-US" sz="1300">
+                <a:latin typeface="Arial" panose="020B0604020202020204" pitchFamily="34" charset="0"/>
+              </a:rPr>
+              <a:t>Sonra, test üçün aşağı şəkildəki kimi şablonlar və onlar üçün routerlər yaradırıq. </a:t>
+            </a:r>
+            <a:endParaRPr kumimoji="0" lang="en-US" altLang="en-US" sz="1300" b="0" i="0" u="none" strike="noStrike" cap="none" normalizeH="0" baseline="0">
+              <a:ln>
+                <a:noFill/>
+              </a:ln>
+              <a:solidFill>
+                <a:schemeClr val="tx1"/>
+              </a:solidFill>
+              <a:effectLst/>
+              <a:latin typeface="Arial" panose="020B0604020202020204" pitchFamily="34" charset="0"/>
+            </a:endParaRPr>
           </a:p>
         </p:txBody>
       </p:sp>
@@ -3484,6 +3841,2491 @@
 </file>
 
 <file path=ppt/slides/slide3.xml><?xml version="1.0" encoding="utf-8"?>
+<p:sld xmlns:a="http://schemas.openxmlformats.org/drawingml/2006/main" xmlns:r="http://schemas.openxmlformats.org/officeDocument/2006/relationships" xmlns:p="http://schemas.openxmlformats.org/presentationml/2006/main">
+  <p:cSld>
+    <p:spTree>
+      <p:nvGrpSpPr>
+        <p:cNvPr id="1" name="">
+          <a:extLst>
+            <a:ext uri="{FF2B5EF4-FFF2-40B4-BE49-F238E27FC236}">
+              <a16:creationId xmlns:a16="http://schemas.microsoft.com/office/drawing/2014/main" id="{15BBB613-78DC-4C3B-193C-551EA8F455A1}"/>
+            </a:ext>
+          </a:extLst>
+        </p:cNvPr>
+        <p:cNvGrpSpPr/>
+        <p:nvPr/>
+      </p:nvGrpSpPr>
+      <p:grpSpPr>
+        <a:xfrm>
+          <a:off x="0" y="0"/>
+          <a:ext cx="0" cy="0"/>
+          <a:chOff x="0" y="0"/>
+          <a:chExt cx="0" cy="0"/>
+        </a:xfrm>
+      </p:grpSpPr>
+      <p:sp>
+        <p:nvSpPr>
+          <p:cNvPr id="3" name="TextBox 2">
+            <a:extLst>
+              <a:ext uri="{FF2B5EF4-FFF2-40B4-BE49-F238E27FC236}">
+                <a16:creationId xmlns:a16="http://schemas.microsoft.com/office/drawing/2014/main" id="{570FC53A-F55C-B8D3-BEE1-EFEAF67140F6}"/>
+              </a:ext>
+            </a:extLst>
+          </p:cNvPr>
+          <p:cNvSpPr txBox="1"/>
+          <p:nvPr/>
+        </p:nvSpPr>
+        <p:spPr>
+          <a:xfrm>
+            <a:off x="217714" y="255046"/>
+            <a:ext cx="11756571" cy="355354"/>
+          </a:xfrm>
+          <a:prstGeom prst="rect">
+            <a:avLst/>
+          </a:prstGeom>
+          <a:noFill/>
+        </p:spPr>
+        <p:txBody>
+          <a:bodyPr wrap="square">
+            <a:spAutoFit/>
+          </a:bodyPr>
+          <a:lstStyle/>
+          <a:p>
+            <a:pPr>
+              <a:lnSpc>
+                <a:spcPct val="150000"/>
+              </a:lnSpc>
+              <a:buNone/>
+            </a:pPr>
+            <a:r>
+              <a:rPr lang="en-US" altLang="en-US" sz="1300">
+                <a:latin typeface="Arial" panose="020B0604020202020204" pitchFamily="34" charset="0"/>
+              </a:rPr>
+              <a:t>`</a:t>
+            </a:r>
+            <a:r>
+              <a:rPr lang="en-US" altLang="en-US" sz="1300" b="1">
+                <a:latin typeface="Arial" panose="020B0604020202020204" pitchFamily="34" charset="0"/>
+              </a:rPr>
+              <a:t>unavailable.blade.php</a:t>
+            </a:r>
+            <a:r>
+              <a:rPr lang="en-US" altLang="en-US" sz="1300">
+                <a:latin typeface="Arial" panose="020B0604020202020204" pitchFamily="34" charset="0"/>
+              </a:rPr>
+              <a:t>` </a:t>
+            </a:r>
+            <a:r>
+              <a:rPr lang="az-Latn-AZ" altLang="en-US" sz="1300">
+                <a:latin typeface="Arial" panose="020B0604020202020204" pitchFamily="34" charset="0"/>
+              </a:rPr>
+              <a:t> faylındakı yazını dəyişdirək.  </a:t>
+            </a:r>
+            <a:endParaRPr kumimoji="0" lang="en-US" altLang="en-US" sz="1300" b="0" i="0" u="none" strike="noStrike" cap="none" normalizeH="0" baseline="0">
+              <a:ln>
+                <a:noFill/>
+              </a:ln>
+              <a:solidFill>
+                <a:schemeClr val="tx1"/>
+              </a:solidFill>
+              <a:effectLst/>
+              <a:latin typeface="Arial" panose="020B0604020202020204" pitchFamily="34" charset="0"/>
+            </a:endParaRPr>
+          </a:p>
+        </p:txBody>
+      </p:sp>
+      <p:pic>
+        <p:nvPicPr>
+          <p:cNvPr id="4" name="Picture 3">
+            <a:extLst>
+              <a:ext uri="{FF2B5EF4-FFF2-40B4-BE49-F238E27FC236}">
+                <a16:creationId xmlns:a16="http://schemas.microsoft.com/office/drawing/2014/main" id="{642D9C66-4053-FEDE-BD5E-B859E90F4401}"/>
+              </a:ext>
+            </a:extLst>
+          </p:cNvPr>
+          <p:cNvPicPr>
+            <a:picLocks noChangeAspect="1"/>
+          </p:cNvPicPr>
+          <p:nvPr/>
+        </p:nvPicPr>
+        <p:blipFill>
+          <a:blip r:embed="rId2"/>
+          <a:stretch>
+            <a:fillRect/>
+          </a:stretch>
+        </p:blipFill>
+        <p:spPr>
+          <a:xfrm>
+            <a:off x="217714" y="1239565"/>
+            <a:ext cx="6287377" cy="2267266"/>
+          </a:xfrm>
+          <a:prstGeom prst="rect">
+            <a:avLst/>
+          </a:prstGeom>
+        </p:spPr>
+      </p:pic>
+    </p:spTree>
+    <p:extLst>
+      <p:ext uri="{BB962C8B-B14F-4D97-AF65-F5344CB8AC3E}">
+        <p14:creationId xmlns:p14="http://schemas.microsoft.com/office/powerpoint/2010/main" val="3741111592"/>
+      </p:ext>
+    </p:extLst>
+  </p:cSld>
+  <p:clrMapOvr>
+    <a:masterClrMapping/>
+  </p:clrMapOvr>
+</p:sld>
+</file>
+
+<file path=ppt/slides/slide4.xml><?xml version="1.0" encoding="utf-8"?>
+<p:sld xmlns:a="http://schemas.openxmlformats.org/drawingml/2006/main" xmlns:r="http://schemas.openxmlformats.org/officeDocument/2006/relationships" xmlns:p="http://schemas.openxmlformats.org/presentationml/2006/main">
+  <p:cSld>
+    <p:spTree>
+      <p:nvGrpSpPr>
+        <p:cNvPr id="1" name="">
+          <a:extLst>
+            <a:ext uri="{FF2B5EF4-FFF2-40B4-BE49-F238E27FC236}">
+              <a16:creationId xmlns:a16="http://schemas.microsoft.com/office/drawing/2014/main" id="{DBFCDEAF-BD0A-AC3F-18EF-CBB62C18F287}"/>
+            </a:ext>
+          </a:extLst>
+        </p:cNvPr>
+        <p:cNvGrpSpPr/>
+        <p:nvPr/>
+      </p:nvGrpSpPr>
+      <p:grpSpPr>
+        <a:xfrm>
+          <a:off x="0" y="0"/>
+          <a:ext cx="0" cy="0"/>
+          <a:chOff x="0" y="0"/>
+          <a:chExt cx="0" cy="0"/>
+        </a:xfrm>
+      </p:grpSpPr>
+      <p:sp>
+        <p:nvSpPr>
+          <p:cNvPr id="3" name="TextBox 2">
+            <a:extLst>
+              <a:ext uri="{FF2B5EF4-FFF2-40B4-BE49-F238E27FC236}">
+                <a16:creationId xmlns:a16="http://schemas.microsoft.com/office/drawing/2014/main" id="{FEC51FCF-3002-3351-124B-D566F8909FB1}"/>
+              </a:ext>
+            </a:extLst>
+          </p:cNvPr>
+          <p:cNvSpPr txBox="1"/>
+          <p:nvPr/>
+        </p:nvSpPr>
+        <p:spPr>
+          <a:xfrm>
+            <a:off x="217714" y="255046"/>
+            <a:ext cx="11756571" cy="355354"/>
+          </a:xfrm>
+          <a:prstGeom prst="rect">
+            <a:avLst/>
+          </a:prstGeom>
+          <a:noFill/>
+        </p:spPr>
+        <p:txBody>
+          <a:bodyPr wrap="square">
+            <a:spAutoFit/>
+          </a:bodyPr>
+          <a:lstStyle/>
+          <a:p>
+            <a:pPr>
+              <a:lnSpc>
+                <a:spcPct val="150000"/>
+              </a:lnSpc>
+              <a:buNone/>
+            </a:pPr>
+            <a:r>
+              <a:rPr lang="az-Latn-AZ" altLang="en-US" sz="1300">
+                <a:latin typeface="Arial" panose="020B0604020202020204" pitchFamily="34" charset="0"/>
+              </a:rPr>
+              <a:t>İndidə `</a:t>
+            </a:r>
+            <a:r>
+              <a:rPr lang="az-Latn-AZ" altLang="en-US" sz="1300" b="1">
+                <a:solidFill>
+                  <a:srgbClr val="FF0000"/>
+                </a:solidFill>
+                <a:latin typeface="Arial" panose="020B0604020202020204" pitchFamily="34" charset="0"/>
+              </a:rPr>
+              <a:t>AuthCheck</a:t>
+            </a:r>
+            <a:r>
+              <a:rPr lang="az-Latn-AZ" altLang="en-US" sz="1300">
+                <a:latin typeface="Arial" panose="020B0604020202020204" pitchFamily="34" charset="0"/>
+              </a:rPr>
+              <a:t>` adında yeni bir </a:t>
+            </a:r>
+            <a:r>
+              <a:rPr lang="en-US" altLang="en-US" sz="1300" b="1">
+                <a:latin typeface="Arial" panose="020B0604020202020204" pitchFamily="34" charset="0"/>
+              </a:rPr>
+              <a:t>middleware</a:t>
+            </a:r>
+            <a:r>
+              <a:rPr lang="en-US" altLang="en-US" sz="1300">
+                <a:latin typeface="Arial" panose="020B0604020202020204" pitchFamily="34" charset="0"/>
+              </a:rPr>
+              <a:t> </a:t>
+            </a:r>
+            <a:r>
+              <a:rPr lang="az-Latn-AZ" altLang="en-US" sz="1300">
+                <a:latin typeface="Arial" panose="020B0604020202020204" pitchFamily="34" charset="0"/>
+              </a:rPr>
+              <a:t>yaradırıq.</a:t>
+            </a:r>
+            <a:endParaRPr kumimoji="0" lang="en-US" altLang="en-US" sz="1300" b="0" i="0" u="none" strike="noStrike" cap="none" normalizeH="0" baseline="0">
+              <a:ln>
+                <a:noFill/>
+              </a:ln>
+              <a:solidFill>
+                <a:schemeClr val="tx1"/>
+              </a:solidFill>
+              <a:effectLst/>
+              <a:latin typeface="Arial" panose="020B0604020202020204" pitchFamily="34" charset="0"/>
+            </a:endParaRPr>
+          </a:p>
+        </p:txBody>
+      </p:sp>
+      <p:pic>
+        <p:nvPicPr>
+          <p:cNvPr id="4" name="Picture 3">
+            <a:extLst>
+              <a:ext uri="{FF2B5EF4-FFF2-40B4-BE49-F238E27FC236}">
+                <a16:creationId xmlns:a16="http://schemas.microsoft.com/office/drawing/2014/main" id="{EA02D779-ADA9-B64A-CCE3-3621BA5A4576}"/>
+              </a:ext>
+            </a:extLst>
+          </p:cNvPr>
+          <p:cNvPicPr>
+            <a:picLocks noChangeAspect="1"/>
+          </p:cNvPicPr>
+          <p:nvPr/>
+        </p:nvPicPr>
+        <p:blipFill>
+          <a:blip r:embed="rId2"/>
+          <a:stretch>
+            <a:fillRect/>
+          </a:stretch>
+        </p:blipFill>
+        <p:spPr>
+          <a:xfrm>
+            <a:off x="0" y="5543367"/>
+            <a:ext cx="7792537" cy="1314633"/>
+          </a:xfrm>
+          <a:prstGeom prst="rect">
+            <a:avLst/>
+          </a:prstGeom>
+        </p:spPr>
+      </p:pic>
+    </p:spTree>
+    <p:extLst>
+      <p:ext uri="{BB962C8B-B14F-4D97-AF65-F5344CB8AC3E}">
+        <p14:creationId xmlns:p14="http://schemas.microsoft.com/office/powerpoint/2010/main" val="2088089617"/>
+      </p:ext>
+    </p:extLst>
+  </p:cSld>
+  <p:clrMapOvr>
+    <a:masterClrMapping/>
+  </p:clrMapOvr>
+</p:sld>
+</file>
+
+<file path=ppt/slides/slide5.xml><?xml version="1.0" encoding="utf-8"?>
+<p:sld xmlns:a="http://schemas.openxmlformats.org/drawingml/2006/main" xmlns:r="http://schemas.openxmlformats.org/officeDocument/2006/relationships" xmlns:p="http://schemas.openxmlformats.org/presentationml/2006/main">
+  <p:cSld>
+    <p:spTree>
+      <p:nvGrpSpPr>
+        <p:cNvPr id="1" name="">
+          <a:extLst>
+            <a:ext uri="{FF2B5EF4-FFF2-40B4-BE49-F238E27FC236}">
+              <a16:creationId xmlns:a16="http://schemas.microsoft.com/office/drawing/2014/main" id="{E90CDB91-F1B8-C8C0-5604-6D8B6355BF0D}"/>
+            </a:ext>
+          </a:extLst>
+        </p:cNvPr>
+        <p:cNvGrpSpPr/>
+        <p:nvPr/>
+      </p:nvGrpSpPr>
+      <p:grpSpPr>
+        <a:xfrm>
+          <a:off x="0" y="0"/>
+          <a:ext cx="0" cy="0"/>
+          <a:chOff x="0" y="0"/>
+          <a:chExt cx="0" cy="0"/>
+        </a:xfrm>
+      </p:grpSpPr>
+      <p:sp>
+        <p:nvSpPr>
+          <p:cNvPr id="3" name="TextBox 2">
+            <a:extLst>
+              <a:ext uri="{FF2B5EF4-FFF2-40B4-BE49-F238E27FC236}">
+                <a16:creationId xmlns:a16="http://schemas.microsoft.com/office/drawing/2014/main" id="{FE46D680-5CFA-7A24-8910-3C82EB60372A}"/>
+              </a:ext>
+            </a:extLst>
+          </p:cNvPr>
+          <p:cNvSpPr txBox="1"/>
+          <p:nvPr/>
+        </p:nvSpPr>
+        <p:spPr>
+          <a:xfrm>
+            <a:off x="217714" y="255046"/>
+            <a:ext cx="11756571" cy="6056915"/>
+          </a:xfrm>
+          <a:prstGeom prst="rect">
+            <a:avLst/>
+          </a:prstGeom>
+          <a:noFill/>
+        </p:spPr>
+        <p:txBody>
+          <a:bodyPr wrap="square">
+            <a:spAutoFit/>
+          </a:bodyPr>
+          <a:lstStyle/>
+          <a:p>
+            <a:pPr>
+              <a:lnSpc>
+                <a:spcPct val="150000"/>
+              </a:lnSpc>
+              <a:buNone/>
+            </a:pPr>
+            <a:r>
+              <a:rPr kumimoji="0" lang="az-Latn-AZ" altLang="en-US" sz="1300" b="0" i="0" u="none" strike="noStrike" cap="none" normalizeH="0" baseline="0">
+                <a:ln>
+                  <a:noFill/>
+                </a:ln>
+                <a:solidFill>
+                  <a:schemeClr val="tx1"/>
+                </a:solidFill>
+                <a:effectLst/>
+                <a:latin typeface="Arial" panose="020B0604020202020204" pitchFamily="34" charset="0"/>
+              </a:rPr>
+              <a:t>Bu `</a:t>
+            </a:r>
+            <a:r>
+              <a:rPr lang="az-Latn-AZ" altLang="en-US" sz="1300" b="1">
+                <a:solidFill>
+                  <a:srgbClr val="FF0000"/>
+                </a:solidFill>
+                <a:latin typeface="Arial" panose="020B0604020202020204" pitchFamily="34" charset="0"/>
+              </a:rPr>
+              <a:t> AuthCheck </a:t>
+            </a:r>
+            <a:r>
+              <a:rPr kumimoji="0" lang="az-Latn-AZ" altLang="en-US" sz="1300" b="0" i="0" u="none" strike="noStrike" cap="none" normalizeH="0" baseline="0">
+                <a:ln>
+                  <a:noFill/>
+                </a:ln>
+                <a:solidFill>
+                  <a:schemeClr val="tx1"/>
+                </a:solidFill>
+                <a:effectLst/>
+                <a:latin typeface="Arial" panose="020B0604020202020204" pitchFamily="34" charset="0"/>
+              </a:rPr>
+              <a:t>` adlı </a:t>
+            </a:r>
+            <a:r>
+              <a:rPr kumimoji="0" lang="en-US" altLang="en-US" sz="1300" b="0" i="0" u="none" strike="noStrike" cap="none" normalizeH="0" baseline="0">
+                <a:ln>
+                  <a:noFill/>
+                </a:ln>
+                <a:solidFill>
+                  <a:schemeClr val="tx1"/>
+                </a:solidFill>
+                <a:effectLst/>
+                <a:latin typeface="Arial" panose="020B0604020202020204" pitchFamily="34" charset="0"/>
+              </a:rPr>
+              <a:t>middleware -</a:t>
+            </a:r>
+            <a:r>
+              <a:rPr kumimoji="0" lang="az-Latn-AZ" altLang="en-US" sz="1300" b="0" i="0" u="none" strike="noStrike" cap="none" normalizeH="0" baseline="0">
+                <a:ln>
+                  <a:noFill/>
+                </a:ln>
+                <a:solidFill>
+                  <a:schemeClr val="tx1"/>
+                </a:solidFill>
+                <a:effectLst/>
+                <a:latin typeface="Arial" panose="020B0604020202020204" pitchFamily="34" charset="0"/>
+              </a:rPr>
+              <a:t>i</a:t>
+            </a:r>
+            <a:r>
+              <a:rPr kumimoji="0" lang="en-US" altLang="en-US" sz="1300" b="0" i="0" u="none" strike="noStrike" cap="none" normalizeH="0" baseline="0">
+                <a:ln>
+                  <a:noFill/>
+                </a:ln>
+                <a:solidFill>
+                  <a:schemeClr val="tx1"/>
+                </a:solidFill>
+                <a:effectLst/>
+                <a:latin typeface="Arial" panose="020B0604020202020204" pitchFamily="34" charset="0"/>
+              </a:rPr>
+              <a:t> </a:t>
+            </a:r>
+            <a:r>
+              <a:rPr kumimoji="0" lang="az-Latn-AZ" altLang="en-US" sz="1300" b="0" i="0" u="none" strike="noStrike" cap="none" normalizeH="0" baseline="0">
+                <a:ln>
+                  <a:noFill/>
+                </a:ln>
+                <a:solidFill>
+                  <a:schemeClr val="tx1"/>
+                </a:solidFill>
+                <a:effectLst/>
+                <a:latin typeface="Arial" panose="020B0604020202020204" pitchFamily="34" charset="0"/>
+              </a:rPr>
+              <a:t>əlavə edirik </a:t>
+            </a:r>
+            <a:r>
+              <a:rPr kumimoji="0" lang="az-Latn-AZ" altLang="en-US" sz="1300" b="1" i="0" u="none" strike="noStrike" cap="none" normalizeH="0" baseline="0">
+                <a:ln>
+                  <a:noFill/>
+                </a:ln>
+                <a:solidFill>
+                  <a:srgbClr val="00B050"/>
+                </a:solidFill>
+                <a:effectLst/>
+                <a:latin typeface="Arial" panose="020B0604020202020204" pitchFamily="34" charset="0"/>
+              </a:rPr>
+              <a:t>$middlewareGroups </a:t>
+            </a:r>
+            <a:r>
+              <a:rPr kumimoji="0" lang="az-Latn-AZ" altLang="en-US" sz="1300" b="0" i="0" u="none" strike="noStrike" cap="none" normalizeH="0" baseline="0">
+                <a:ln>
+                  <a:noFill/>
+                </a:ln>
+                <a:solidFill>
+                  <a:schemeClr val="tx1"/>
+                </a:solidFill>
+                <a:effectLst/>
+                <a:latin typeface="Arial" panose="020B0604020202020204" pitchFamily="34" charset="0"/>
+              </a:rPr>
+              <a:t>massivinə. </a:t>
+            </a:r>
+            <a:r>
+              <a:rPr kumimoji="0" lang="en-US" altLang="en-US" sz="1300" b="0" i="0" u="none" strike="noStrike" cap="none" normalizeH="0" baseline="0">
+                <a:ln>
+                  <a:noFill/>
+                </a:ln>
+                <a:solidFill>
+                  <a:schemeClr val="tx1"/>
+                </a:solidFill>
+                <a:effectLst/>
+                <a:latin typeface="Arial" panose="020B0604020202020204" pitchFamily="34" charset="0"/>
+              </a:rPr>
+              <a:t>Indi </a:t>
+            </a:r>
+            <a:r>
+              <a:rPr kumimoji="0" lang="az-Latn-AZ" altLang="en-US" sz="1300" b="0" i="0" u="none" strike="noStrike" cap="none" normalizeH="0" baseline="0">
+                <a:ln>
+                  <a:noFill/>
+                </a:ln>
+                <a:solidFill>
+                  <a:schemeClr val="tx1"/>
+                </a:solidFill>
+                <a:effectLst/>
+                <a:latin typeface="Arial" panose="020B0604020202020204" pitchFamily="34" charset="0"/>
+              </a:rPr>
+              <a:t>göstərəcəyimiz</a:t>
+            </a:r>
+            <a:r>
+              <a:rPr kumimoji="0" lang="en-US" altLang="en-US" sz="1300" b="0" i="0" u="none" strike="noStrike" cap="none" normalizeH="0" baseline="0">
+                <a:ln>
+                  <a:noFill/>
+                </a:ln>
+                <a:solidFill>
+                  <a:schemeClr val="tx1"/>
+                </a:solidFill>
+                <a:effectLst/>
+                <a:latin typeface="Arial" panose="020B0604020202020204" pitchFamily="34" charset="0"/>
+              </a:rPr>
+              <a:t> nümunə</a:t>
+            </a:r>
+            <a:r>
+              <a:rPr lang="az-Latn-AZ" altLang="en-US" sz="1300">
+                <a:latin typeface="Arial" panose="020B0604020202020204" pitchFamily="34" charset="0"/>
+              </a:rPr>
+              <a:t> ilə,</a:t>
+            </a:r>
+            <a:r>
+              <a:rPr kumimoji="0" lang="en-US" altLang="en-US" sz="1300" b="0" i="0" u="none" strike="noStrike" cap="none" normalizeH="0" baseline="0">
+                <a:ln>
+                  <a:noFill/>
+                </a:ln>
+                <a:solidFill>
+                  <a:schemeClr val="tx1"/>
+                </a:solidFill>
+                <a:effectLst/>
+                <a:latin typeface="Arial" panose="020B0604020202020204" pitchFamily="34" charset="0"/>
+              </a:rPr>
+              <a:t> Laravel-də </a:t>
+            </a:r>
+            <a:r>
+              <a:rPr kumimoji="0" lang="en-US" altLang="en-US" sz="1300" b="1" i="0" u="none" strike="noStrike" cap="none" normalizeH="0" baseline="0">
+                <a:ln>
+                  <a:noFill/>
+                </a:ln>
+                <a:solidFill>
+                  <a:schemeClr val="tx1"/>
+                </a:solidFill>
+                <a:effectLst/>
+                <a:latin typeface="Arial" panose="020B0604020202020204" pitchFamily="34" charset="0"/>
+              </a:rPr>
+              <a:t>custom middleware </a:t>
+            </a:r>
+            <a:r>
+              <a:rPr kumimoji="0" lang="en-US" altLang="en-US" sz="1300" b="0" i="0" u="none" strike="noStrike" cap="none" normalizeH="0" baseline="0">
+                <a:ln>
+                  <a:noFill/>
+                </a:ln>
+                <a:solidFill>
+                  <a:schemeClr val="tx1"/>
+                </a:solidFill>
+                <a:effectLst/>
+                <a:latin typeface="Arial" panose="020B0604020202020204" pitchFamily="34" charset="0"/>
+              </a:rPr>
+              <a:t>istifadə edərək </a:t>
+            </a:r>
+            <a:r>
+              <a:rPr kumimoji="0" lang="en-US" altLang="en-US" sz="1300" b="1" i="0" u="none" strike="noStrike" cap="none" normalizeH="0" baseline="0">
+                <a:ln>
+                  <a:noFill/>
+                </a:ln>
+                <a:solidFill>
+                  <a:schemeClr val="tx1"/>
+                </a:solidFill>
+                <a:effectLst/>
+                <a:latin typeface="Arial" panose="020B0604020202020204" pitchFamily="34" charset="0"/>
+              </a:rPr>
+              <a:t>route</a:t>
+            </a:r>
+            <a:r>
+              <a:rPr kumimoji="0" lang="en-US" altLang="en-US" sz="1300" b="0" i="0" u="none" strike="noStrike" cap="none" normalizeH="0" baseline="0">
+                <a:ln>
+                  <a:noFill/>
+                </a:ln>
+                <a:solidFill>
+                  <a:schemeClr val="tx1"/>
+                </a:solidFill>
+                <a:effectLst/>
+                <a:latin typeface="Arial" panose="020B0604020202020204" pitchFamily="34" charset="0"/>
+              </a:rPr>
+              <a:t> qruplarına</a:t>
+            </a:r>
+            <a:r>
+              <a:rPr kumimoji="0" lang="az-Latn-AZ" altLang="en-US" sz="1300" b="0" i="0" u="none" strike="noStrike" cap="none" normalizeH="0" baseline="0">
+                <a:ln>
+                  <a:noFill/>
+                </a:ln>
+                <a:solidFill>
+                  <a:schemeClr val="tx1"/>
+                </a:solidFill>
+                <a:effectLst/>
+                <a:latin typeface="Arial" panose="020B0604020202020204" pitchFamily="34" charset="0"/>
+              </a:rPr>
+              <a:t> ( group ) həmin</a:t>
+            </a:r>
+            <a:r>
+              <a:rPr kumimoji="0" lang="en-US" altLang="en-US" sz="1300" b="0" i="0" u="none" strike="noStrike" cap="none" normalizeH="0" baseline="0">
+                <a:ln>
+                  <a:noFill/>
+                </a:ln>
+                <a:solidFill>
+                  <a:schemeClr val="tx1"/>
+                </a:solidFill>
+                <a:effectLst/>
+                <a:latin typeface="Arial" panose="020B0604020202020204" pitchFamily="34" charset="0"/>
+              </a:rPr>
+              <a:t> </a:t>
+            </a:r>
+            <a:r>
+              <a:rPr kumimoji="0" lang="en-US" altLang="en-US" sz="1300" b="1" i="0" u="none" strike="noStrike" cap="none" normalizeH="0" baseline="0">
+                <a:ln>
+                  <a:noFill/>
+                </a:ln>
+                <a:solidFill>
+                  <a:schemeClr val="tx1"/>
+                </a:solidFill>
+                <a:effectLst/>
+                <a:latin typeface="Arial" panose="020B0604020202020204" pitchFamily="34" charset="0"/>
+              </a:rPr>
+              <a:t>custom middleware </a:t>
+            </a:r>
+            <a:r>
+              <a:rPr kumimoji="0" lang="az-Latn-AZ" altLang="en-US" sz="1300" b="0" i="0" u="none" strike="noStrike" cap="none" normalizeH="0" baseline="0">
+                <a:ln>
+                  <a:noFill/>
+                </a:ln>
+                <a:solidFill>
+                  <a:schemeClr val="tx1"/>
+                </a:solidFill>
+                <a:effectLst/>
+                <a:latin typeface="Arial" panose="020B0604020202020204" pitchFamily="34" charset="0"/>
+              </a:rPr>
+              <a:t>-in</a:t>
+            </a:r>
+            <a:r>
+              <a:rPr kumimoji="0" lang="en-US" altLang="en-US" sz="1300" b="0" i="0" u="none" strike="noStrike" cap="none" normalizeH="0" baseline="0">
+                <a:ln>
+                  <a:noFill/>
+                </a:ln>
+                <a:solidFill>
+                  <a:schemeClr val="tx1"/>
+                </a:solidFill>
+                <a:effectLst/>
+                <a:latin typeface="Arial" panose="020B0604020202020204" pitchFamily="34" charset="0"/>
+              </a:rPr>
+              <a:t> necə tətbiq olunduğunu gö</a:t>
+            </a:r>
+            <a:r>
+              <a:rPr kumimoji="0" lang="az-Latn-AZ" altLang="en-US" sz="1300" b="0" i="0" u="none" strike="noStrike" cap="none" normalizeH="0" baseline="0">
+                <a:ln>
+                  <a:noFill/>
+                </a:ln>
+                <a:solidFill>
+                  <a:schemeClr val="tx1"/>
+                </a:solidFill>
+                <a:effectLst/>
+                <a:latin typeface="Arial" panose="020B0604020202020204" pitchFamily="34" charset="0"/>
+              </a:rPr>
+              <a:t>rəcəyik</a:t>
+            </a:r>
+            <a:r>
+              <a:rPr kumimoji="0" lang="en-US" altLang="en-US" sz="1300" b="0" i="0" u="none" strike="noStrike" cap="none" normalizeH="0" baseline="0">
+                <a:ln>
+                  <a:noFill/>
+                </a:ln>
+                <a:solidFill>
+                  <a:schemeClr val="tx1"/>
+                </a:solidFill>
+                <a:effectLst/>
+                <a:latin typeface="Arial" panose="020B0604020202020204" pitchFamily="34" charset="0"/>
+              </a:rPr>
+              <a:t>.</a:t>
+            </a:r>
+            <a:endParaRPr kumimoji="0" lang="az-Latn-AZ" altLang="en-US" sz="1300" b="0" i="0" u="none" strike="noStrike" cap="none" normalizeH="0" baseline="0">
+              <a:ln>
+                <a:noFill/>
+              </a:ln>
+              <a:solidFill>
+                <a:schemeClr val="tx1"/>
+              </a:solidFill>
+              <a:effectLst/>
+              <a:latin typeface="Arial" panose="020B0604020202020204" pitchFamily="34" charset="0"/>
+            </a:endParaRPr>
+          </a:p>
+          <a:p>
+            <a:pPr>
+              <a:lnSpc>
+                <a:spcPct val="150000"/>
+              </a:lnSpc>
+              <a:buNone/>
+            </a:pPr>
+            <a:endParaRPr lang="az-Latn-AZ" altLang="en-US" sz="1300">
+              <a:latin typeface="Arial" panose="020B0604020202020204" pitchFamily="34" charset="0"/>
+            </a:endParaRPr>
+          </a:p>
+          <a:p>
+            <a:pPr>
+              <a:lnSpc>
+                <a:spcPct val="150000"/>
+              </a:lnSpc>
+              <a:buNone/>
+            </a:pPr>
+            <a:endParaRPr kumimoji="0" lang="az-Latn-AZ" altLang="en-US" sz="1300" b="0" i="0" u="none" strike="noStrike" cap="none" normalizeH="0" baseline="0">
+              <a:ln>
+                <a:noFill/>
+              </a:ln>
+              <a:solidFill>
+                <a:schemeClr val="tx1"/>
+              </a:solidFill>
+              <a:effectLst/>
+              <a:latin typeface="Arial" panose="020B0604020202020204" pitchFamily="34" charset="0"/>
+            </a:endParaRPr>
+          </a:p>
+          <a:p>
+            <a:pPr marL="342900" indent="-342900">
+              <a:lnSpc>
+                <a:spcPct val="150000"/>
+              </a:lnSpc>
+              <a:buAutoNum type="arabicPeriod"/>
+            </a:pPr>
+            <a:r>
+              <a:rPr kumimoji="0" lang="en-US" altLang="en-US" sz="1300" b="1" i="0" u="none" strike="noStrike" cap="none" normalizeH="0" baseline="0">
+                <a:ln>
+                  <a:noFill/>
+                </a:ln>
+                <a:solidFill>
+                  <a:schemeClr val="tx1"/>
+                </a:solidFill>
+                <a:effectLst/>
+                <a:latin typeface="Arial" panose="020B0604020202020204" pitchFamily="34" charset="0"/>
+              </a:rPr>
+              <a:t>app/Http/Kernel.php </a:t>
+            </a:r>
+            <a:r>
+              <a:rPr kumimoji="0" lang="en-US" altLang="en-US" sz="1300" b="0" i="0" u="none" strike="noStrike" cap="none" normalizeH="0" baseline="0">
+                <a:ln>
+                  <a:noFill/>
+                </a:ln>
+                <a:solidFill>
+                  <a:schemeClr val="tx1"/>
+                </a:solidFill>
+                <a:effectLst/>
+                <a:latin typeface="Arial" panose="020B0604020202020204" pitchFamily="34" charset="0"/>
+              </a:rPr>
+              <a:t>– Middleware Qrupları</a:t>
+            </a:r>
+            <a:endParaRPr kumimoji="0" lang="az-Latn-AZ" altLang="en-US" sz="1300" b="0" i="0" u="none" strike="noStrike" cap="none" normalizeH="0" baseline="0">
+              <a:ln>
+                <a:noFill/>
+              </a:ln>
+              <a:solidFill>
+                <a:schemeClr val="tx1"/>
+              </a:solidFill>
+              <a:effectLst/>
+              <a:latin typeface="Arial" panose="020B0604020202020204" pitchFamily="34" charset="0"/>
+            </a:endParaRPr>
+          </a:p>
+          <a:p>
+            <a:pPr marL="342900" indent="-342900">
+              <a:lnSpc>
+                <a:spcPct val="150000"/>
+              </a:lnSpc>
+              <a:buAutoNum type="arabicPeriod"/>
+            </a:pPr>
+            <a:endParaRPr lang="az-Latn-AZ" altLang="en-US" sz="1300">
+              <a:latin typeface="Arial" panose="020B0604020202020204" pitchFamily="34" charset="0"/>
+            </a:endParaRPr>
+          </a:p>
+          <a:p>
+            <a:pPr marL="342900" indent="-342900">
+              <a:lnSpc>
+                <a:spcPct val="150000"/>
+              </a:lnSpc>
+              <a:buAutoNum type="arabicPeriod"/>
+            </a:pPr>
+            <a:endParaRPr kumimoji="0" lang="az-Latn-AZ" altLang="en-US" sz="1300" b="0" i="0" u="none" strike="noStrike" cap="none" normalizeH="0" baseline="0">
+              <a:ln>
+                <a:noFill/>
+              </a:ln>
+              <a:solidFill>
+                <a:schemeClr val="tx1"/>
+              </a:solidFill>
+              <a:effectLst/>
+              <a:latin typeface="Arial" panose="020B0604020202020204" pitchFamily="34" charset="0"/>
+            </a:endParaRPr>
+          </a:p>
+          <a:p>
+            <a:pPr marL="342900" indent="-342900">
+              <a:lnSpc>
+                <a:spcPct val="150000"/>
+              </a:lnSpc>
+              <a:buAutoNum type="arabicPeriod"/>
+            </a:pPr>
+            <a:endParaRPr lang="az-Latn-AZ" altLang="en-US" sz="1300">
+              <a:latin typeface="Arial" panose="020B0604020202020204" pitchFamily="34" charset="0"/>
+            </a:endParaRPr>
+          </a:p>
+          <a:p>
+            <a:pPr marL="342900" indent="-342900">
+              <a:lnSpc>
+                <a:spcPct val="150000"/>
+              </a:lnSpc>
+              <a:buAutoNum type="arabicPeriod"/>
+            </a:pPr>
+            <a:endParaRPr kumimoji="0" lang="az-Latn-AZ" altLang="en-US" sz="1300" b="0" i="0" u="none" strike="noStrike" cap="none" normalizeH="0" baseline="0">
+              <a:ln>
+                <a:noFill/>
+              </a:ln>
+              <a:solidFill>
+                <a:schemeClr val="tx1"/>
+              </a:solidFill>
+              <a:effectLst/>
+              <a:latin typeface="Arial" panose="020B0604020202020204" pitchFamily="34" charset="0"/>
+            </a:endParaRPr>
+          </a:p>
+          <a:p>
+            <a:pPr marL="342900" indent="-342900">
+              <a:lnSpc>
+                <a:spcPct val="150000"/>
+              </a:lnSpc>
+              <a:buAutoNum type="arabicPeriod"/>
+            </a:pPr>
+            <a:endParaRPr lang="az-Latn-AZ" altLang="en-US" sz="1300">
+              <a:latin typeface="Arial" panose="020B0604020202020204" pitchFamily="34" charset="0"/>
+            </a:endParaRPr>
+          </a:p>
+          <a:p>
+            <a:pPr marL="342900" indent="-342900">
+              <a:lnSpc>
+                <a:spcPct val="150000"/>
+              </a:lnSpc>
+              <a:buAutoNum type="arabicPeriod"/>
+            </a:pPr>
+            <a:endParaRPr kumimoji="0" lang="az-Latn-AZ" altLang="en-US" sz="1300" b="0" i="0" u="none" strike="noStrike" cap="none" normalizeH="0" baseline="0">
+              <a:ln>
+                <a:noFill/>
+              </a:ln>
+              <a:solidFill>
+                <a:schemeClr val="tx1"/>
+              </a:solidFill>
+              <a:effectLst/>
+              <a:latin typeface="Arial" panose="020B0604020202020204" pitchFamily="34" charset="0"/>
+            </a:endParaRPr>
+          </a:p>
+          <a:p>
+            <a:pPr marL="342900" indent="-342900">
+              <a:lnSpc>
+                <a:spcPct val="150000"/>
+              </a:lnSpc>
+              <a:buAutoNum type="arabicPeriod"/>
+            </a:pPr>
+            <a:endParaRPr lang="az-Latn-AZ" altLang="en-US" sz="1300">
+              <a:latin typeface="Arial" panose="020B0604020202020204" pitchFamily="34" charset="0"/>
+            </a:endParaRPr>
+          </a:p>
+          <a:p>
+            <a:pPr marL="342900" indent="-342900">
+              <a:lnSpc>
+                <a:spcPct val="150000"/>
+              </a:lnSpc>
+              <a:buAutoNum type="arabicPeriod"/>
+            </a:pPr>
+            <a:endParaRPr kumimoji="0" lang="az-Latn-AZ" altLang="en-US" sz="1300" b="0" i="0" u="none" strike="noStrike" cap="none" normalizeH="0" baseline="0">
+              <a:ln>
+                <a:noFill/>
+              </a:ln>
+              <a:solidFill>
+                <a:schemeClr val="tx1"/>
+              </a:solidFill>
+              <a:effectLst/>
+              <a:latin typeface="Arial" panose="020B0604020202020204" pitchFamily="34" charset="0"/>
+            </a:endParaRPr>
+          </a:p>
+          <a:p>
+            <a:pPr>
+              <a:lnSpc>
+                <a:spcPct val="150000"/>
+              </a:lnSpc>
+            </a:pPr>
+            <a:endParaRPr kumimoji="0" lang="az-Latn-AZ" altLang="en-US" sz="1300" b="0" i="0" u="none" strike="noStrike" cap="none" normalizeH="0" baseline="0">
+              <a:ln>
+                <a:noFill/>
+              </a:ln>
+              <a:solidFill>
+                <a:schemeClr val="tx1"/>
+              </a:solidFill>
+              <a:effectLst/>
+              <a:latin typeface="Arial" panose="020B0604020202020204" pitchFamily="34" charset="0"/>
+            </a:endParaRPr>
+          </a:p>
+          <a:p>
+            <a:pPr>
+              <a:lnSpc>
+                <a:spcPct val="150000"/>
+              </a:lnSpc>
+            </a:pPr>
+            <a:r>
+              <a:rPr kumimoji="0" lang="en-US" altLang="en-US" sz="1300" b="1" i="0" u="none" strike="noStrike" cap="none" normalizeH="0" baseline="0">
+                <a:ln>
+                  <a:noFill/>
+                </a:ln>
+                <a:solidFill>
+                  <a:schemeClr val="tx1"/>
+                </a:solidFill>
+                <a:effectLst/>
+                <a:latin typeface="Arial" panose="020B0604020202020204" pitchFamily="34" charset="0"/>
+              </a:rPr>
+              <a:t>İzah</a:t>
+            </a:r>
+            <a:r>
+              <a:rPr kumimoji="0" lang="en-US" altLang="en-US" sz="1300" b="0" i="0" u="none" strike="noStrike" cap="none" normalizeH="0" baseline="0">
+                <a:ln>
+                  <a:noFill/>
+                </a:ln>
+                <a:solidFill>
+                  <a:schemeClr val="tx1"/>
+                </a:solidFill>
+                <a:effectLst/>
+                <a:latin typeface="Arial" panose="020B0604020202020204" pitchFamily="34" charset="0"/>
+              </a:rPr>
+              <a:t>:</a:t>
+            </a:r>
+          </a:p>
+          <a:p>
+            <a:pPr marL="285750" indent="-285750">
+              <a:lnSpc>
+                <a:spcPct val="150000"/>
+              </a:lnSpc>
+              <a:buFont typeface="Wingdings" panose="05000000000000000000" pitchFamily="2" charset="2"/>
+              <a:buChar char="q"/>
+            </a:pPr>
+            <a:r>
+              <a:rPr kumimoji="0" lang="en-US" altLang="en-US" sz="1300" b="0" i="0" u="none" strike="noStrike" cap="none" normalizeH="0" baseline="0">
+                <a:ln>
+                  <a:noFill/>
+                </a:ln>
+                <a:solidFill>
+                  <a:schemeClr val="tx1"/>
+                </a:solidFill>
+                <a:effectLst/>
+                <a:latin typeface="Arial" panose="020B0604020202020204" pitchFamily="34" charset="0"/>
+              </a:rPr>
+              <a:t>Laravel </a:t>
+            </a:r>
+            <a:r>
+              <a:rPr kumimoji="0" lang="en-US" altLang="en-US" sz="1300" b="1" i="0" u="none" strike="noStrike" cap="none" normalizeH="0" baseline="0">
+                <a:ln>
+                  <a:noFill/>
+                </a:ln>
+                <a:solidFill>
+                  <a:schemeClr val="tx1"/>
+                </a:solidFill>
+                <a:effectLst/>
+                <a:latin typeface="Arial" panose="020B0604020202020204" pitchFamily="34" charset="0"/>
+              </a:rPr>
+              <a:t>Kernel.php </a:t>
+            </a:r>
+            <a:r>
+              <a:rPr kumimoji="0" lang="en-US" altLang="en-US" sz="1300" b="0" i="0" u="none" strike="noStrike" cap="none" normalizeH="0" baseline="0">
+                <a:ln>
+                  <a:noFill/>
+                </a:ln>
+                <a:solidFill>
+                  <a:schemeClr val="tx1"/>
+                </a:solidFill>
+                <a:effectLst/>
+                <a:latin typeface="Arial" panose="020B0604020202020204" pitchFamily="34" charset="0"/>
+              </a:rPr>
+              <a:t>faylında müxtəlif middleware qrupları tanınır.</a:t>
+            </a:r>
+          </a:p>
+          <a:p>
+            <a:pPr marL="285750" indent="-285750">
+              <a:lnSpc>
+                <a:spcPct val="150000"/>
+              </a:lnSpc>
+              <a:buFont typeface="Wingdings" panose="05000000000000000000" pitchFamily="2" charset="2"/>
+              <a:buChar char="q"/>
+            </a:pPr>
+            <a:r>
+              <a:rPr kumimoji="0" lang="en-US" altLang="en-US" sz="1300" b="0" i="0" u="none" strike="noStrike" cap="none" normalizeH="0" baseline="0">
+                <a:ln>
+                  <a:noFill/>
+                </a:ln>
+                <a:solidFill>
+                  <a:schemeClr val="tx1"/>
+                </a:solidFill>
+                <a:effectLst/>
+                <a:latin typeface="Arial" panose="020B0604020202020204" pitchFamily="34" charset="0"/>
+              </a:rPr>
+              <a:t>Burada </a:t>
+            </a:r>
+            <a:r>
+              <a:rPr kumimoji="0" lang="en-US" altLang="en-US" sz="1300" b="1" i="0" u="none" strike="noStrike" cap="none" normalizeH="0" baseline="0">
+                <a:ln>
+                  <a:noFill/>
+                </a:ln>
+                <a:solidFill>
+                  <a:schemeClr val="tx1"/>
+                </a:solidFill>
+                <a:effectLst/>
+                <a:latin typeface="Arial" panose="020B0604020202020204" pitchFamily="34" charset="0"/>
+              </a:rPr>
+              <a:t>web</a:t>
+            </a:r>
+            <a:r>
+              <a:rPr kumimoji="0" lang="en-US" altLang="en-US" sz="1300" b="0" i="0" u="none" strike="noStrike" cap="none" normalizeH="0" baseline="0">
+                <a:ln>
+                  <a:noFill/>
+                </a:ln>
+                <a:solidFill>
+                  <a:schemeClr val="tx1"/>
+                </a:solidFill>
+                <a:effectLst/>
+                <a:latin typeface="Arial" panose="020B0604020202020204" pitchFamily="34" charset="0"/>
+              </a:rPr>
+              <a:t>, </a:t>
+            </a:r>
+            <a:r>
+              <a:rPr kumimoji="0" lang="en-US" altLang="en-US" sz="1300" b="1" i="0" u="none" strike="noStrike" cap="none" normalizeH="0" baseline="0">
+                <a:ln>
+                  <a:noFill/>
+                </a:ln>
+                <a:solidFill>
+                  <a:schemeClr val="tx1"/>
+                </a:solidFill>
+                <a:effectLst/>
+                <a:latin typeface="Arial" panose="020B0604020202020204" pitchFamily="34" charset="0"/>
+              </a:rPr>
+              <a:t>api</a:t>
+            </a:r>
+            <a:r>
+              <a:rPr kumimoji="0" lang="en-US" altLang="en-US" sz="1300" b="0" i="0" u="none" strike="noStrike" cap="none" normalizeH="0" baseline="0">
+                <a:ln>
+                  <a:noFill/>
+                </a:ln>
+                <a:solidFill>
+                  <a:schemeClr val="tx1"/>
+                </a:solidFill>
+                <a:effectLst/>
+                <a:latin typeface="Arial" panose="020B0604020202020204" pitchFamily="34" charset="0"/>
+              </a:rPr>
+              <a:t> Laravel-in daxili default qruplarıdır.</a:t>
+            </a:r>
+          </a:p>
+          <a:p>
+            <a:pPr marL="285750" indent="-285750">
+              <a:lnSpc>
+                <a:spcPct val="150000"/>
+              </a:lnSpc>
+              <a:buFont typeface="Wingdings" panose="05000000000000000000" pitchFamily="2" charset="2"/>
+              <a:buChar char="q"/>
+            </a:pPr>
+            <a:r>
+              <a:rPr kumimoji="0" lang="en-US" altLang="en-US" sz="1300" b="1" i="0" u="none" strike="noStrike" cap="none" normalizeH="0" baseline="0">
+                <a:ln>
+                  <a:noFill/>
+                </a:ln>
+                <a:solidFill>
+                  <a:schemeClr val="tx1"/>
+                </a:solidFill>
+                <a:effectLst/>
+                <a:latin typeface="Arial" panose="020B0604020202020204" pitchFamily="34" charset="0"/>
+              </a:rPr>
+              <a:t>authCheck</a:t>
+            </a:r>
+            <a:r>
+              <a:rPr kumimoji="0" lang="en-US" altLang="en-US" sz="1300" b="0" i="0" u="none" strike="noStrike" cap="none" normalizeH="0" baseline="0">
+                <a:ln>
+                  <a:noFill/>
+                </a:ln>
+                <a:solidFill>
+                  <a:schemeClr val="tx1"/>
+                </a:solidFill>
+                <a:effectLst/>
+                <a:latin typeface="Arial" panose="020B0604020202020204" pitchFamily="34" charset="0"/>
+              </a:rPr>
+              <a:t> adlı yeni bir </a:t>
+            </a:r>
+            <a:r>
+              <a:rPr kumimoji="0" lang="en-US" altLang="en-US" sz="1300" b="1" i="0" u="none" strike="noStrike" cap="none" normalizeH="0" baseline="0">
+                <a:ln>
+                  <a:noFill/>
+                </a:ln>
+                <a:solidFill>
+                  <a:schemeClr val="tx1"/>
+                </a:solidFill>
+                <a:effectLst/>
+                <a:latin typeface="Arial" panose="020B0604020202020204" pitchFamily="34" charset="0"/>
+              </a:rPr>
+              <a:t>middleware</a:t>
+            </a:r>
+            <a:r>
+              <a:rPr kumimoji="0" lang="en-US" altLang="en-US" sz="1300" b="0" i="0" u="none" strike="noStrike" cap="none" normalizeH="0" baseline="0">
+                <a:ln>
+                  <a:noFill/>
+                </a:ln>
+                <a:solidFill>
+                  <a:schemeClr val="tx1"/>
+                </a:solidFill>
+                <a:effectLst/>
+                <a:latin typeface="Arial" panose="020B0604020202020204" pitchFamily="34" charset="0"/>
+              </a:rPr>
+              <a:t> qrupu yaradılıb və </a:t>
+            </a:r>
+            <a:r>
+              <a:rPr kumimoji="0" lang="en-US" altLang="en-US" sz="1300" b="1" i="0" u="none" strike="noStrike" cap="none" normalizeH="0" baseline="0">
+                <a:ln>
+                  <a:noFill/>
+                </a:ln>
+                <a:solidFill>
+                  <a:schemeClr val="tx1"/>
+                </a:solidFill>
+                <a:effectLst/>
+                <a:latin typeface="Arial" panose="020B0604020202020204" pitchFamily="34" charset="0"/>
+              </a:rPr>
+              <a:t>AuthCheck</a:t>
+            </a:r>
+            <a:r>
+              <a:rPr kumimoji="0" lang="en-US" altLang="en-US" sz="1300" b="0" i="0" u="none" strike="noStrike" cap="none" normalizeH="0" baseline="0">
+                <a:ln>
+                  <a:noFill/>
+                </a:ln>
+                <a:solidFill>
+                  <a:schemeClr val="tx1"/>
+                </a:solidFill>
+                <a:effectLst/>
+                <a:latin typeface="Arial" panose="020B0604020202020204" pitchFamily="34" charset="0"/>
+              </a:rPr>
+              <a:t> middleware-i ora əlavə edilib.</a:t>
+            </a:r>
+            <a:endParaRPr kumimoji="0" lang="az-Latn-AZ" altLang="en-US" sz="1300" b="0" i="0" u="none" strike="noStrike" cap="none" normalizeH="0" baseline="0">
+              <a:ln>
+                <a:noFill/>
+              </a:ln>
+              <a:solidFill>
+                <a:schemeClr val="tx1"/>
+              </a:solidFill>
+              <a:effectLst/>
+              <a:latin typeface="Arial" panose="020B0604020202020204" pitchFamily="34" charset="0"/>
+            </a:endParaRPr>
+          </a:p>
+          <a:p>
+            <a:pPr>
+              <a:lnSpc>
+                <a:spcPct val="150000"/>
+              </a:lnSpc>
+            </a:pPr>
+            <a:endParaRPr lang="az-Latn-AZ" altLang="en-US" sz="1300">
+              <a:latin typeface="Arial" panose="020B0604020202020204" pitchFamily="34" charset="0"/>
+            </a:endParaRPr>
+          </a:p>
+          <a:p>
+            <a:pPr>
+              <a:lnSpc>
+                <a:spcPct val="150000"/>
+              </a:lnSpc>
+            </a:pPr>
+            <a:r>
+              <a:rPr kumimoji="0" lang="en-US" altLang="en-US" sz="1300" b="0" i="0" u="none" strike="noStrike" cap="none" normalizeH="0" baseline="0">
+                <a:ln>
+                  <a:noFill/>
+                </a:ln>
+                <a:solidFill>
+                  <a:schemeClr val="tx1"/>
+                </a:solidFill>
+                <a:effectLst/>
+                <a:latin typeface="Arial" panose="020B0604020202020204" pitchFamily="34" charset="0"/>
+              </a:rPr>
+              <a:t>Bu o deməkdir ki, bu </a:t>
+            </a:r>
+            <a:r>
+              <a:rPr kumimoji="0" lang="en-US" altLang="en-US" sz="1300" b="1" i="0" u="none" strike="noStrike" cap="none" normalizeH="0" baseline="0">
+                <a:ln>
+                  <a:noFill/>
+                </a:ln>
+                <a:solidFill>
+                  <a:schemeClr val="tx1"/>
+                </a:solidFill>
+                <a:effectLst/>
+                <a:latin typeface="Arial" panose="020B0604020202020204" pitchFamily="34" charset="0"/>
+              </a:rPr>
+              <a:t>authCheck</a:t>
+            </a:r>
+            <a:r>
+              <a:rPr kumimoji="0" lang="en-US" altLang="en-US" sz="1300" b="0" i="0" u="none" strike="noStrike" cap="none" normalizeH="0" baseline="0">
+                <a:ln>
+                  <a:noFill/>
+                </a:ln>
+                <a:solidFill>
+                  <a:schemeClr val="tx1"/>
+                </a:solidFill>
+                <a:effectLst/>
+                <a:latin typeface="Arial" panose="020B0604020202020204" pitchFamily="34" charset="0"/>
+              </a:rPr>
+              <a:t> middleware</a:t>
+            </a:r>
+            <a:r>
+              <a:rPr kumimoji="0" lang="az-Latn-AZ" altLang="en-US" sz="1300" b="0" i="0" u="none" strike="noStrike" cap="none" normalizeH="0" baseline="0">
+                <a:ln>
+                  <a:noFill/>
+                </a:ln>
+                <a:solidFill>
+                  <a:schemeClr val="tx1"/>
+                </a:solidFill>
+                <a:effectLst/>
+                <a:latin typeface="Arial" panose="020B0604020202020204" pitchFamily="34" charset="0"/>
+              </a:rPr>
+              <a:t> </a:t>
+            </a:r>
+            <a:r>
+              <a:rPr kumimoji="0" lang="en-US" altLang="en-US" sz="1300" b="0" i="0" u="none" strike="noStrike" cap="none" normalizeH="0" baseline="0">
+                <a:ln>
+                  <a:noFill/>
+                </a:ln>
+                <a:solidFill>
+                  <a:schemeClr val="tx1"/>
+                </a:solidFill>
+                <a:effectLst/>
+                <a:latin typeface="Arial" panose="020B0604020202020204" pitchFamily="34" charset="0"/>
+              </a:rPr>
+              <a:t>-</a:t>
+            </a:r>
+            <a:r>
+              <a:rPr kumimoji="0" lang="az-Latn-AZ" altLang="en-US" sz="1300" b="0" i="0" u="none" strike="noStrike" cap="none" normalizeH="0" baseline="0">
+                <a:ln>
+                  <a:noFill/>
+                </a:ln>
+                <a:solidFill>
+                  <a:schemeClr val="tx1"/>
+                </a:solidFill>
+                <a:effectLst/>
+                <a:latin typeface="Arial" panose="020B0604020202020204" pitchFamily="34" charset="0"/>
+              </a:rPr>
+              <a:t>n</a:t>
+            </a:r>
+            <a:r>
+              <a:rPr kumimoji="0" lang="en-US" altLang="en-US" sz="1300" b="0" i="0" u="none" strike="noStrike" cap="none" normalizeH="0" baseline="0">
+                <a:ln>
+                  <a:noFill/>
+                </a:ln>
+                <a:solidFill>
+                  <a:schemeClr val="tx1"/>
+                </a:solidFill>
+                <a:effectLst/>
+                <a:latin typeface="Arial" panose="020B0604020202020204" pitchFamily="34" charset="0"/>
+              </a:rPr>
+              <a:t>i istədiyin </a:t>
+            </a:r>
+            <a:r>
+              <a:rPr kumimoji="0" lang="en-US" altLang="en-US" sz="1300" b="1" i="0" u="none" strike="noStrike" cap="none" normalizeH="0" baseline="0">
+                <a:ln>
+                  <a:noFill/>
+                </a:ln>
+                <a:solidFill>
+                  <a:schemeClr val="tx1"/>
+                </a:solidFill>
+                <a:effectLst/>
+                <a:latin typeface="Arial" panose="020B0604020202020204" pitchFamily="34" charset="0"/>
+              </a:rPr>
+              <a:t>route qrupuna </a:t>
+            </a:r>
+            <a:r>
+              <a:rPr kumimoji="0" lang="en-US" altLang="en-US" sz="1300" b="0" i="0" u="none" strike="noStrike" cap="none" normalizeH="0" baseline="0">
+                <a:ln>
+                  <a:noFill/>
+                </a:ln>
+                <a:solidFill>
+                  <a:schemeClr val="tx1"/>
+                </a:solidFill>
+                <a:effectLst/>
+                <a:latin typeface="Arial" panose="020B0604020202020204" pitchFamily="34" charset="0"/>
+              </a:rPr>
+              <a:t>tətbiq edə bilərsən (</a:t>
+            </a:r>
+            <a:r>
+              <a:rPr kumimoji="0" lang="az-Latn-AZ" altLang="en-US" sz="1300" b="0" i="0" u="none" strike="noStrike" cap="none" normalizeH="0" baseline="0">
+                <a:ln>
+                  <a:noFill/>
+                </a:ln>
+                <a:solidFill>
+                  <a:schemeClr val="tx1"/>
+                </a:solidFill>
+                <a:effectLst/>
+                <a:latin typeface="Arial" panose="020B0604020202020204" pitchFamily="34" charset="0"/>
+              </a:rPr>
+              <a:t> </a:t>
+            </a:r>
+            <a:r>
+              <a:rPr kumimoji="0" lang="en-US" altLang="en-US" sz="1300" b="1" i="0" u="none" strike="noStrike" cap="none" normalizeH="0" baseline="0">
+                <a:ln>
+                  <a:noFill/>
+                </a:ln>
+                <a:solidFill>
+                  <a:schemeClr val="tx1"/>
+                </a:solidFill>
+                <a:effectLst/>
+                <a:latin typeface="Arial" panose="020B0604020202020204" pitchFamily="34" charset="0"/>
+              </a:rPr>
+              <a:t>Route::group(['middleware' =&gt; 'authCheck'], ...)</a:t>
+            </a:r>
+            <a:r>
+              <a:rPr kumimoji="0" lang="az-Latn-AZ" altLang="en-US" sz="1300" b="1" i="0" u="none" strike="noStrike" cap="none" normalizeH="0" baseline="0">
+                <a:ln>
+                  <a:noFill/>
+                </a:ln>
+                <a:solidFill>
+                  <a:schemeClr val="tx1"/>
+                </a:solidFill>
+                <a:effectLst/>
+                <a:latin typeface="Arial" panose="020B0604020202020204" pitchFamily="34" charset="0"/>
+              </a:rPr>
+              <a:t> </a:t>
+            </a:r>
+            <a:r>
+              <a:rPr kumimoji="0" lang="en-US" altLang="en-US" sz="1300" b="0" i="0" u="none" strike="noStrike" cap="none" normalizeH="0" baseline="0">
+                <a:ln>
+                  <a:noFill/>
+                </a:ln>
+                <a:solidFill>
+                  <a:schemeClr val="tx1"/>
+                </a:solidFill>
+                <a:effectLst/>
+                <a:latin typeface="Arial" panose="020B0604020202020204" pitchFamily="34" charset="0"/>
+              </a:rPr>
+              <a:t>)</a:t>
+            </a:r>
+            <a:r>
+              <a:rPr kumimoji="0" lang="az-Latn-AZ" altLang="en-US" sz="1300" b="0" i="0" u="none" strike="noStrike" cap="none" normalizeH="0" baseline="0">
+                <a:ln>
+                  <a:noFill/>
+                </a:ln>
+                <a:solidFill>
+                  <a:schemeClr val="tx1"/>
+                </a:solidFill>
+                <a:effectLst/>
+                <a:latin typeface="Arial" panose="020B0604020202020204" pitchFamily="34" charset="0"/>
+              </a:rPr>
+              <a:t> </a:t>
+            </a:r>
+            <a:r>
+              <a:rPr kumimoji="0" lang="en-US" altLang="en-US" sz="1300" b="0" i="0" u="none" strike="noStrike" cap="none" normalizeH="0" baseline="0">
+                <a:ln>
+                  <a:noFill/>
+                </a:ln>
+                <a:solidFill>
+                  <a:schemeClr val="tx1"/>
+                </a:solidFill>
+                <a:effectLst/>
+                <a:latin typeface="Arial" panose="020B0604020202020204" pitchFamily="34" charset="0"/>
+              </a:rPr>
+              <a:t>.</a:t>
+            </a:r>
+          </a:p>
+        </p:txBody>
+      </p:sp>
+      <p:pic>
+        <p:nvPicPr>
+          <p:cNvPr id="4" name="Picture 3">
+            <a:extLst>
+              <a:ext uri="{FF2B5EF4-FFF2-40B4-BE49-F238E27FC236}">
+                <a16:creationId xmlns:a16="http://schemas.microsoft.com/office/drawing/2014/main" id="{318D1DC2-A378-06A9-5E65-2397F62DE35F}"/>
+              </a:ext>
+            </a:extLst>
+          </p:cNvPr>
+          <p:cNvPicPr>
+            <a:picLocks noChangeAspect="1"/>
+          </p:cNvPicPr>
+          <p:nvPr/>
+        </p:nvPicPr>
+        <p:blipFill>
+          <a:blip r:embed="rId2"/>
+          <a:stretch>
+            <a:fillRect/>
+          </a:stretch>
+        </p:blipFill>
+        <p:spPr>
+          <a:xfrm>
+            <a:off x="0" y="1967619"/>
+            <a:ext cx="3877216" cy="1848108"/>
+          </a:xfrm>
+          <a:prstGeom prst="rect">
+            <a:avLst/>
+          </a:prstGeom>
+        </p:spPr>
+      </p:pic>
+    </p:spTree>
+    <p:extLst>
+      <p:ext uri="{BB962C8B-B14F-4D97-AF65-F5344CB8AC3E}">
+        <p14:creationId xmlns:p14="http://schemas.microsoft.com/office/powerpoint/2010/main" val="1441360278"/>
+      </p:ext>
+    </p:extLst>
+  </p:cSld>
+  <p:clrMapOvr>
+    <a:masterClrMapping/>
+  </p:clrMapOvr>
+</p:sld>
+</file>
+
+<file path=ppt/slides/slide6.xml><?xml version="1.0" encoding="utf-8"?>
+<p:sld xmlns:a="http://schemas.openxmlformats.org/drawingml/2006/main" xmlns:r="http://schemas.openxmlformats.org/officeDocument/2006/relationships" xmlns:p="http://schemas.openxmlformats.org/presentationml/2006/main">
+  <p:cSld>
+    <p:spTree>
+      <p:nvGrpSpPr>
+        <p:cNvPr id="1" name="">
+          <a:extLst>
+            <a:ext uri="{FF2B5EF4-FFF2-40B4-BE49-F238E27FC236}">
+              <a16:creationId xmlns:a16="http://schemas.microsoft.com/office/drawing/2014/main" id="{F8946CCF-4FBB-9077-41EE-EC9446F14AB8}"/>
+            </a:ext>
+          </a:extLst>
+        </p:cNvPr>
+        <p:cNvGrpSpPr/>
+        <p:nvPr/>
+      </p:nvGrpSpPr>
+      <p:grpSpPr>
+        <a:xfrm>
+          <a:off x="0" y="0"/>
+          <a:ext cx="0" cy="0"/>
+          <a:chOff x="0" y="0"/>
+          <a:chExt cx="0" cy="0"/>
+        </a:xfrm>
+      </p:grpSpPr>
+      <p:sp>
+        <p:nvSpPr>
+          <p:cNvPr id="3" name="TextBox 2">
+            <a:extLst>
+              <a:ext uri="{FF2B5EF4-FFF2-40B4-BE49-F238E27FC236}">
+                <a16:creationId xmlns:a16="http://schemas.microsoft.com/office/drawing/2014/main" id="{98494D02-9CC2-2F9F-66E0-083B35FF7E55}"/>
+              </a:ext>
+            </a:extLst>
+          </p:cNvPr>
+          <p:cNvSpPr txBox="1"/>
+          <p:nvPr/>
+        </p:nvSpPr>
+        <p:spPr>
+          <a:xfrm>
+            <a:off x="217714" y="255046"/>
+            <a:ext cx="11756571" cy="6056915"/>
+          </a:xfrm>
+          <a:prstGeom prst="rect">
+            <a:avLst/>
+          </a:prstGeom>
+          <a:noFill/>
+        </p:spPr>
+        <p:txBody>
+          <a:bodyPr wrap="square">
+            <a:spAutoFit/>
+          </a:bodyPr>
+          <a:lstStyle/>
+          <a:p>
+            <a:pPr>
+              <a:lnSpc>
+                <a:spcPct val="150000"/>
+              </a:lnSpc>
+              <a:buNone/>
+            </a:pPr>
+            <a:r>
+              <a:rPr kumimoji="0" lang="en-US" altLang="en-US" sz="1300" b="0" i="0" u="none" strike="noStrike" cap="none" normalizeH="0" baseline="0">
+                <a:ln>
+                  <a:noFill/>
+                </a:ln>
+                <a:solidFill>
+                  <a:schemeClr val="tx1"/>
+                </a:solidFill>
+                <a:effectLst/>
+                <a:latin typeface="Arial" panose="020B0604020202020204" pitchFamily="34" charset="0"/>
+              </a:rPr>
+              <a:t>2. </a:t>
+            </a:r>
+            <a:r>
+              <a:rPr kumimoji="0" lang="en-US" altLang="en-US" sz="1300" b="1" i="0" u="none" strike="noStrike" cap="none" normalizeH="0" baseline="0">
+                <a:ln>
+                  <a:noFill/>
+                </a:ln>
+                <a:solidFill>
+                  <a:schemeClr val="tx1"/>
+                </a:solidFill>
+                <a:effectLst/>
+                <a:latin typeface="Arial" panose="020B0604020202020204" pitchFamily="34" charset="0"/>
+              </a:rPr>
+              <a:t>app/Http/Middleware/AuthCheck.php</a:t>
+            </a:r>
+            <a:endParaRPr kumimoji="0" lang="az-Latn-AZ" altLang="en-US" sz="1300" b="1" i="0" u="none" strike="noStrike" cap="none" normalizeH="0" baseline="0">
+              <a:ln>
+                <a:noFill/>
+              </a:ln>
+              <a:solidFill>
+                <a:schemeClr val="tx1"/>
+              </a:solidFill>
+              <a:effectLst/>
+              <a:latin typeface="Arial" panose="020B0604020202020204" pitchFamily="34" charset="0"/>
+            </a:endParaRPr>
+          </a:p>
+          <a:p>
+            <a:pPr>
+              <a:lnSpc>
+                <a:spcPct val="150000"/>
+              </a:lnSpc>
+              <a:buNone/>
+            </a:pPr>
+            <a:endParaRPr lang="az-Latn-AZ" altLang="en-US" sz="1300">
+              <a:latin typeface="Arial" panose="020B0604020202020204" pitchFamily="34" charset="0"/>
+            </a:endParaRPr>
+          </a:p>
+          <a:p>
+            <a:pPr>
+              <a:lnSpc>
+                <a:spcPct val="150000"/>
+              </a:lnSpc>
+              <a:buNone/>
+            </a:pPr>
+            <a:endParaRPr kumimoji="0" lang="az-Latn-AZ" altLang="en-US" sz="1300" i="0" u="none" strike="noStrike" cap="none" normalizeH="0" baseline="0">
+              <a:ln>
+                <a:noFill/>
+              </a:ln>
+              <a:solidFill>
+                <a:schemeClr val="tx1"/>
+              </a:solidFill>
+              <a:effectLst/>
+              <a:latin typeface="Arial" panose="020B0604020202020204" pitchFamily="34" charset="0"/>
+            </a:endParaRPr>
+          </a:p>
+          <a:p>
+            <a:pPr>
+              <a:lnSpc>
+                <a:spcPct val="150000"/>
+              </a:lnSpc>
+              <a:buNone/>
+            </a:pPr>
+            <a:endParaRPr lang="az-Latn-AZ" altLang="en-US" sz="1300">
+              <a:latin typeface="Arial" panose="020B0604020202020204" pitchFamily="34" charset="0"/>
+            </a:endParaRPr>
+          </a:p>
+          <a:p>
+            <a:pPr>
+              <a:lnSpc>
+                <a:spcPct val="150000"/>
+              </a:lnSpc>
+              <a:buNone/>
+            </a:pPr>
+            <a:endParaRPr lang="az-Latn-AZ" altLang="en-US" sz="1300">
+              <a:latin typeface="Arial" panose="020B0604020202020204" pitchFamily="34" charset="0"/>
+            </a:endParaRPr>
+          </a:p>
+          <a:p>
+            <a:pPr>
+              <a:lnSpc>
+                <a:spcPct val="150000"/>
+              </a:lnSpc>
+              <a:buNone/>
+            </a:pPr>
+            <a:endParaRPr kumimoji="0" lang="az-Latn-AZ" altLang="en-US" sz="1300" i="0" u="none" strike="noStrike" cap="none" normalizeH="0" baseline="0">
+              <a:ln>
+                <a:noFill/>
+              </a:ln>
+              <a:solidFill>
+                <a:schemeClr val="tx1"/>
+              </a:solidFill>
+              <a:effectLst/>
+              <a:latin typeface="Arial" panose="020B0604020202020204" pitchFamily="34" charset="0"/>
+            </a:endParaRPr>
+          </a:p>
+          <a:p>
+            <a:pPr>
+              <a:lnSpc>
+                <a:spcPct val="150000"/>
+              </a:lnSpc>
+              <a:buNone/>
+            </a:pPr>
+            <a:endParaRPr lang="az-Latn-AZ" altLang="en-US" sz="1300">
+              <a:latin typeface="Arial" panose="020B0604020202020204" pitchFamily="34" charset="0"/>
+            </a:endParaRPr>
+          </a:p>
+          <a:p>
+            <a:pPr>
+              <a:lnSpc>
+                <a:spcPct val="150000"/>
+              </a:lnSpc>
+              <a:buNone/>
+            </a:pPr>
+            <a:r>
+              <a:rPr kumimoji="0" lang="en-US" altLang="en-US" sz="1300" b="1" i="0" u="none" strike="noStrike" cap="none" normalizeH="0" baseline="0">
+                <a:ln>
+                  <a:noFill/>
+                </a:ln>
+                <a:solidFill>
+                  <a:schemeClr val="tx1"/>
+                </a:solidFill>
+                <a:effectLst/>
+                <a:latin typeface="Arial" panose="020B0604020202020204" pitchFamily="34" charset="0"/>
+              </a:rPr>
+              <a:t>İzah</a:t>
+            </a:r>
+            <a:r>
+              <a:rPr kumimoji="0" lang="en-US" altLang="en-US" sz="1300" i="0" u="none" strike="noStrike" cap="none" normalizeH="0" baseline="0">
+                <a:ln>
+                  <a:noFill/>
+                </a:ln>
+                <a:solidFill>
+                  <a:schemeClr val="tx1"/>
+                </a:solidFill>
+                <a:effectLst/>
+                <a:latin typeface="Arial" panose="020B0604020202020204" pitchFamily="34" charset="0"/>
+              </a:rPr>
+              <a:t>:</a:t>
+            </a:r>
+            <a:r>
+              <a:rPr kumimoji="0" lang="az-Latn-AZ" altLang="en-US" sz="1300" i="0" u="none" strike="noStrike" cap="none" normalizeH="0" baseline="0">
+                <a:ln>
+                  <a:noFill/>
+                </a:ln>
+                <a:solidFill>
+                  <a:schemeClr val="tx1"/>
+                </a:solidFill>
+                <a:effectLst/>
+                <a:latin typeface="Arial" panose="020B0604020202020204" pitchFamily="34" charset="0"/>
+              </a:rPr>
+              <a:t> Bu </a:t>
+            </a:r>
+            <a:r>
+              <a:rPr kumimoji="0" lang="az-Latn-AZ" altLang="en-US" sz="1300" b="1" i="0" u="none" strike="noStrike" cap="none" normalizeH="0" baseline="0">
+                <a:ln>
+                  <a:noFill/>
+                </a:ln>
+                <a:solidFill>
+                  <a:schemeClr val="tx1"/>
+                </a:solidFill>
+                <a:effectLst/>
+                <a:latin typeface="Arial" panose="020B0604020202020204" pitchFamily="34" charset="0"/>
+              </a:rPr>
+              <a:t>middleware</a:t>
+            </a:r>
+            <a:r>
+              <a:rPr kumimoji="0" lang="az-Latn-AZ" altLang="en-US" sz="1300" i="0" u="none" strike="noStrike" cap="none" normalizeH="0" baseline="0">
+                <a:ln>
+                  <a:noFill/>
+                </a:ln>
+                <a:solidFill>
+                  <a:schemeClr val="tx1"/>
+                </a:solidFill>
+                <a:effectLst/>
+                <a:latin typeface="Arial" panose="020B0604020202020204" pitchFamily="34" charset="0"/>
+              </a:rPr>
+              <a:t> sadə bir yoxlama aparır:</a:t>
+            </a:r>
+          </a:p>
+          <a:p>
+            <a:pPr>
+              <a:lnSpc>
+                <a:spcPct val="150000"/>
+              </a:lnSpc>
+              <a:buNone/>
+            </a:pPr>
+            <a:endParaRPr lang="az-Latn-AZ" altLang="en-US" sz="1300">
+              <a:latin typeface="Arial" panose="020B0604020202020204" pitchFamily="34" charset="0"/>
+            </a:endParaRPr>
+          </a:p>
+          <a:p>
+            <a:pPr>
+              <a:lnSpc>
+                <a:spcPct val="150000"/>
+              </a:lnSpc>
+              <a:buNone/>
+            </a:pPr>
+            <a:endParaRPr kumimoji="0" lang="az-Latn-AZ" altLang="en-US" sz="1300" i="0" u="none" strike="noStrike" cap="none" normalizeH="0" baseline="0">
+              <a:ln>
+                <a:noFill/>
+              </a:ln>
+              <a:solidFill>
+                <a:schemeClr val="tx1"/>
+              </a:solidFill>
+              <a:effectLst/>
+              <a:latin typeface="Arial" panose="020B0604020202020204" pitchFamily="34" charset="0"/>
+            </a:endParaRPr>
+          </a:p>
+          <a:p>
+            <a:pPr>
+              <a:lnSpc>
+                <a:spcPct val="150000"/>
+              </a:lnSpc>
+              <a:buNone/>
+            </a:pPr>
+            <a:endParaRPr kumimoji="0" lang="az-Latn-AZ" altLang="en-US" sz="1300" i="0" u="none" strike="noStrike" cap="none" normalizeH="0" baseline="0">
+              <a:ln>
+                <a:noFill/>
+              </a:ln>
+              <a:solidFill>
+                <a:schemeClr val="tx1"/>
+              </a:solidFill>
+              <a:effectLst/>
+              <a:latin typeface="Arial" panose="020B0604020202020204" pitchFamily="34" charset="0"/>
+            </a:endParaRPr>
+          </a:p>
+          <a:p>
+            <a:pPr>
+              <a:lnSpc>
+                <a:spcPct val="150000"/>
+              </a:lnSpc>
+              <a:buNone/>
+            </a:pPr>
+            <a:endParaRPr lang="az-Latn-AZ" altLang="en-US" sz="1300">
+              <a:latin typeface="Arial" panose="020B0604020202020204" pitchFamily="34" charset="0"/>
+            </a:endParaRPr>
+          </a:p>
+          <a:p>
+            <a:pPr>
+              <a:lnSpc>
+                <a:spcPct val="150000"/>
+              </a:lnSpc>
+              <a:buNone/>
+            </a:pPr>
+            <a:endParaRPr kumimoji="0" lang="az-Latn-AZ" altLang="en-US" sz="1300" i="0" u="none" strike="noStrike" cap="none" normalizeH="0" baseline="0">
+              <a:ln>
+                <a:noFill/>
+              </a:ln>
+              <a:solidFill>
+                <a:schemeClr val="tx1"/>
+              </a:solidFill>
+              <a:effectLst/>
+              <a:latin typeface="Arial" panose="020B0604020202020204" pitchFamily="34" charset="0"/>
+            </a:endParaRPr>
+          </a:p>
+          <a:p>
+            <a:pPr>
+              <a:lnSpc>
+                <a:spcPct val="150000"/>
+              </a:lnSpc>
+              <a:buNone/>
+            </a:pPr>
+            <a:endParaRPr lang="az-Latn-AZ" altLang="en-US" sz="1300">
+              <a:latin typeface="Arial" panose="020B0604020202020204" pitchFamily="34" charset="0"/>
+            </a:endParaRPr>
+          </a:p>
+          <a:p>
+            <a:pPr>
+              <a:lnSpc>
+                <a:spcPct val="150000"/>
+              </a:lnSpc>
+              <a:buNone/>
+            </a:pPr>
+            <a:r>
+              <a:rPr kumimoji="0" lang="en-US" altLang="en-US" sz="1300" b="1" i="0" u="none" strike="noStrike" cap="none" normalizeH="0" baseline="0">
+                <a:ln>
+                  <a:noFill/>
+                </a:ln>
+                <a:solidFill>
+                  <a:schemeClr val="tx1"/>
+                </a:solidFill>
+                <a:effectLst/>
+                <a:latin typeface="Arial" panose="020B0604020202020204" pitchFamily="34" charset="0"/>
+              </a:rPr>
+              <a:t>Ətraflı</a:t>
+            </a:r>
+            <a:r>
+              <a:rPr kumimoji="0" lang="en-US" altLang="en-US" sz="1300" i="0" u="none" strike="noStrike" cap="none" normalizeH="0" baseline="0">
+                <a:ln>
+                  <a:noFill/>
+                </a:ln>
+                <a:solidFill>
+                  <a:schemeClr val="tx1"/>
+                </a:solidFill>
+                <a:effectLst/>
+                <a:latin typeface="Arial" panose="020B0604020202020204" pitchFamily="34" charset="0"/>
+              </a:rPr>
+              <a:t>:</a:t>
+            </a:r>
+          </a:p>
+          <a:p>
+            <a:pPr marL="285750" indent="-285750">
+              <a:lnSpc>
+                <a:spcPct val="150000"/>
+              </a:lnSpc>
+              <a:buFont typeface="Wingdings" panose="05000000000000000000" pitchFamily="2" charset="2"/>
+              <a:buChar char="q"/>
+            </a:pPr>
+            <a:r>
+              <a:rPr kumimoji="0" lang="en-US" altLang="en-US" sz="1300" b="1" i="0" u="none" strike="noStrike" cap="none" normalizeH="0" baseline="0">
+                <a:ln>
+                  <a:noFill/>
+                </a:ln>
+                <a:solidFill>
+                  <a:schemeClr val="tx1"/>
+                </a:solidFill>
+                <a:effectLst/>
+                <a:latin typeface="Arial" panose="020B0604020202020204" pitchFamily="34" charset="0"/>
+              </a:rPr>
+              <a:t>$request-&gt;has('auth') </a:t>
+            </a:r>
+            <a:r>
+              <a:rPr kumimoji="0" lang="en-US" altLang="en-US" sz="1300" i="0" u="none" strike="noStrike" cap="none" normalizeH="0" baseline="0">
+                <a:ln>
+                  <a:noFill/>
+                </a:ln>
+                <a:solidFill>
+                  <a:schemeClr val="tx1"/>
+                </a:solidFill>
+                <a:effectLst/>
+                <a:latin typeface="Arial" panose="020B0604020202020204" pitchFamily="34" charset="0"/>
+              </a:rPr>
+              <a:t>– yoxlayır ki, </a:t>
+            </a:r>
+            <a:r>
+              <a:rPr kumimoji="0" lang="en-US" altLang="en-US" sz="1300" b="1" i="0" u="none" strike="noStrike" cap="none" normalizeH="0" baseline="0">
+                <a:ln>
+                  <a:noFill/>
+                </a:ln>
+                <a:solidFill>
+                  <a:schemeClr val="tx1"/>
+                </a:solidFill>
+                <a:effectLst/>
+                <a:latin typeface="Arial" panose="020B0604020202020204" pitchFamily="34" charset="0"/>
+              </a:rPr>
+              <a:t>auth</a:t>
+            </a:r>
+            <a:r>
+              <a:rPr kumimoji="0" lang="en-US" altLang="en-US" sz="1300" i="0" u="none" strike="noStrike" cap="none" normalizeH="0" baseline="0">
+                <a:ln>
+                  <a:noFill/>
+                </a:ln>
+                <a:solidFill>
+                  <a:schemeClr val="tx1"/>
+                </a:solidFill>
+                <a:effectLst/>
+                <a:latin typeface="Arial" panose="020B0604020202020204" pitchFamily="34" charset="0"/>
+              </a:rPr>
+              <a:t> adlı </a:t>
+            </a:r>
+            <a:r>
+              <a:rPr kumimoji="0" lang="en-US" altLang="en-US" sz="1300" b="1" i="0" u="none" strike="noStrike" cap="none" normalizeH="0" baseline="0">
+                <a:ln>
+                  <a:noFill/>
+                </a:ln>
+                <a:solidFill>
+                  <a:schemeClr val="tx1"/>
+                </a:solidFill>
+                <a:effectLst/>
+                <a:latin typeface="Arial" panose="020B0604020202020204" pitchFamily="34" charset="0"/>
+              </a:rPr>
+              <a:t>query parametri </a:t>
+            </a:r>
+            <a:r>
+              <a:rPr kumimoji="0" lang="en-US" altLang="en-US" sz="1300" i="0" u="none" strike="noStrike" cap="none" normalizeH="0" baseline="0">
+                <a:ln>
+                  <a:noFill/>
+                </a:ln>
+                <a:solidFill>
+                  <a:schemeClr val="tx1"/>
+                </a:solidFill>
+                <a:effectLst/>
+                <a:latin typeface="Arial" panose="020B0604020202020204" pitchFamily="34" charset="0"/>
+              </a:rPr>
+              <a:t>gəlirmi? Məsələn:</a:t>
+            </a:r>
+            <a:r>
+              <a:rPr kumimoji="0" lang="az-Latn-AZ" altLang="en-US" sz="1300" i="0" u="none" strike="noStrike" cap="none" normalizeH="0" baseline="0">
+                <a:ln>
+                  <a:noFill/>
+                </a:ln>
+                <a:solidFill>
+                  <a:schemeClr val="tx1"/>
+                </a:solidFill>
+                <a:effectLst/>
+                <a:latin typeface="Arial" panose="020B0604020202020204" pitchFamily="34" charset="0"/>
+              </a:rPr>
+              <a:t> </a:t>
+            </a:r>
+            <a:r>
+              <a:rPr kumimoji="0" lang="en-US" altLang="en-US" sz="1300" i="0" u="sng" strike="noStrike" cap="none" normalizeH="0" baseline="0">
+                <a:ln>
+                  <a:noFill/>
+                </a:ln>
+                <a:solidFill>
+                  <a:srgbClr val="0070C0"/>
+                </a:solidFill>
+                <a:effectLst/>
+                <a:latin typeface="Arial" panose="020B0604020202020204" pitchFamily="34" charset="0"/>
+              </a:rPr>
+              <a:t>http://localhost:8000/dashboard?auth=1</a:t>
+            </a:r>
+          </a:p>
+          <a:p>
+            <a:pPr marL="285750" indent="-285750">
+              <a:lnSpc>
+                <a:spcPct val="150000"/>
+              </a:lnSpc>
+              <a:buFont typeface="Wingdings" panose="05000000000000000000" pitchFamily="2" charset="2"/>
+              <a:buChar char="q"/>
+            </a:pPr>
+            <a:r>
+              <a:rPr kumimoji="0" lang="en-US" altLang="en-US" sz="1300" b="1" i="0" u="none" strike="noStrike" cap="none" normalizeH="0" baseline="0">
+                <a:ln>
+                  <a:noFill/>
+                </a:ln>
+                <a:solidFill>
+                  <a:schemeClr val="tx1"/>
+                </a:solidFill>
+                <a:effectLst/>
+                <a:latin typeface="Arial" panose="020B0604020202020204" pitchFamily="34" charset="0"/>
+              </a:rPr>
+              <a:t>$request-&gt;auth == 1 </a:t>
+            </a:r>
+            <a:r>
+              <a:rPr kumimoji="0" lang="en-US" altLang="en-US" sz="1300" i="0" u="none" strike="noStrike" cap="none" normalizeH="0" baseline="0">
+                <a:ln>
+                  <a:noFill/>
+                </a:ln>
+                <a:solidFill>
+                  <a:schemeClr val="tx1"/>
+                </a:solidFill>
+                <a:effectLst/>
+                <a:latin typeface="Arial" panose="020B0604020202020204" pitchFamily="34" charset="0"/>
+              </a:rPr>
+              <a:t>– həmin parametrin dəyəri </a:t>
+            </a:r>
+            <a:r>
+              <a:rPr kumimoji="0" lang="en-US" altLang="en-US" sz="1300" b="1" i="0" u="none" strike="noStrike" cap="none" normalizeH="0" baseline="0">
+                <a:ln>
+                  <a:noFill/>
+                </a:ln>
+                <a:solidFill>
+                  <a:schemeClr val="tx1"/>
+                </a:solidFill>
+                <a:effectLst/>
+                <a:latin typeface="Arial" panose="020B0604020202020204" pitchFamily="34" charset="0"/>
+              </a:rPr>
+              <a:t>1</a:t>
+            </a:r>
+            <a:r>
+              <a:rPr kumimoji="0" lang="en-US" altLang="en-US" sz="1300" i="0" u="none" strike="noStrike" cap="none" normalizeH="0" baseline="0">
+                <a:ln>
+                  <a:noFill/>
+                </a:ln>
+                <a:solidFill>
+                  <a:schemeClr val="tx1"/>
+                </a:solidFill>
+                <a:effectLst/>
+                <a:latin typeface="Arial" panose="020B0604020202020204" pitchFamily="34" charset="0"/>
+              </a:rPr>
+              <a:t> olmalıdır.</a:t>
+            </a:r>
+          </a:p>
+          <a:p>
+            <a:pPr marL="285750" indent="-285750">
+              <a:lnSpc>
+                <a:spcPct val="150000"/>
+              </a:lnSpc>
+              <a:buFont typeface="Wingdings" panose="05000000000000000000" pitchFamily="2" charset="2"/>
+              <a:buChar char="q"/>
+            </a:pPr>
+            <a:r>
+              <a:rPr kumimoji="0" lang="en-US" altLang="en-US" sz="1300" i="0" u="none" strike="noStrike" cap="none" normalizeH="0" baseline="0">
+                <a:ln>
+                  <a:noFill/>
+                </a:ln>
+                <a:solidFill>
+                  <a:schemeClr val="tx1"/>
+                </a:solidFill>
+                <a:effectLst/>
+                <a:latin typeface="Arial" panose="020B0604020202020204" pitchFamily="34" charset="0"/>
+              </a:rPr>
+              <a:t>Əgər bu şərtlər ödənməzsə → </a:t>
+            </a:r>
+            <a:r>
+              <a:rPr kumimoji="0" lang="en-US" altLang="en-US" sz="1300" b="1" i="0" u="none" strike="noStrike" cap="none" normalizeH="0" baseline="0">
+                <a:ln>
+                  <a:noFill/>
+                </a:ln>
+                <a:solidFill>
+                  <a:schemeClr val="tx1"/>
+                </a:solidFill>
+                <a:effectLst/>
+                <a:latin typeface="Arial" panose="020B0604020202020204" pitchFamily="34" charset="0"/>
+              </a:rPr>
+              <a:t>redirect ol</a:t>
+            </a:r>
+            <a:r>
+              <a:rPr kumimoji="0" lang="az-Latn-AZ" altLang="en-US" sz="1300" b="1" i="0" u="none" strike="noStrike" cap="none" normalizeH="0" baseline="0">
+                <a:ln>
+                  <a:noFill/>
+                </a:ln>
+                <a:solidFill>
+                  <a:schemeClr val="tx1"/>
+                </a:solidFill>
+                <a:effectLst/>
+                <a:latin typeface="Arial" panose="020B0604020202020204" pitchFamily="34" charset="0"/>
+              </a:rPr>
+              <a:t>uruq </a:t>
+            </a:r>
+            <a:r>
+              <a:rPr kumimoji="0" lang="en-US" altLang="en-US" sz="1300" b="1" i="0" u="none" strike="noStrike" cap="none" normalizeH="0" baseline="0">
+                <a:ln>
+                  <a:noFill/>
+                </a:ln>
+                <a:solidFill>
+                  <a:schemeClr val="tx1"/>
+                </a:solidFill>
+                <a:effectLst/>
+                <a:latin typeface="Arial" panose="020B0604020202020204" pitchFamily="34" charset="0"/>
+              </a:rPr>
+              <a:t>/unavailable</a:t>
+            </a:r>
+            <a:endParaRPr kumimoji="0" lang="az-Latn-AZ" altLang="en-US" sz="1300" b="1" i="0" u="none" strike="noStrike" cap="none" normalizeH="0" baseline="0">
+              <a:ln>
+                <a:noFill/>
+              </a:ln>
+              <a:solidFill>
+                <a:schemeClr val="tx1"/>
+              </a:solidFill>
+              <a:effectLst/>
+              <a:latin typeface="Arial" panose="020B0604020202020204" pitchFamily="34" charset="0"/>
+            </a:endParaRPr>
+          </a:p>
+          <a:p>
+            <a:pPr>
+              <a:lnSpc>
+                <a:spcPct val="150000"/>
+              </a:lnSpc>
+              <a:buNone/>
+            </a:pPr>
+            <a:endParaRPr lang="az-Latn-AZ" altLang="en-US" sz="1300">
+              <a:latin typeface="Arial" panose="020B0604020202020204" pitchFamily="34" charset="0"/>
+            </a:endParaRPr>
+          </a:p>
+          <a:p>
+            <a:pPr>
+              <a:lnSpc>
+                <a:spcPct val="150000"/>
+              </a:lnSpc>
+              <a:buNone/>
+            </a:pPr>
+            <a:endParaRPr kumimoji="0" lang="en-US" altLang="en-US" sz="1300" i="0" u="none" strike="noStrike" cap="none" normalizeH="0" baseline="0">
+              <a:ln>
+                <a:noFill/>
+              </a:ln>
+              <a:solidFill>
+                <a:schemeClr val="tx1"/>
+              </a:solidFill>
+              <a:effectLst/>
+              <a:latin typeface="Arial" panose="020B0604020202020204" pitchFamily="34" charset="0"/>
+            </a:endParaRPr>
+          </a:p>
+        </p:txBody>
+      </p:sp>
+      <p:pic>
+        <p:nvPicPr>
+          <p:cNvPr id="4" name="Picture 3">
+            <a:extLst>
+              <a:ext uri="{FF2B5EF4-FFF2-40B4-BE49-F238E27FC236}">
+                <a16:creationId xmlns:a16="http://schemas.microsoft.com/office/drawing/2014/main" id="{71793406-E6AA-F476-5BE8-FC5EDA50F2E4}"/>
+              </a:ext>
+            </a:extLst>
+          </p:cNvPr>
+          <p:cNvPicPr>
+            <a:picLocks noChangeAspect="1"/>
+          </p:cNvPicPr>
+          <p:nvPr/>
+        </p:nvPicPr>
+        <p:blipFill>
+          <a:blip r:embed="rId2"/>
+          <a:stretch>
+            <a:fillRect/>
+          </a:stretch>
+        </p:blipFill>
+        <p:spPr>
+          <a:xfrm>
+            <a:off x="3802144" y="0"/>
+            <a:ext cx="4204355" cy="2068573"/>
+          </a:xfrm>
+          <a:prstGeom prst="rect">
+            <a:avLst/>
+          </a:prstGeom>
+        </p:spPr>
+      </p:pic>
+      <p:graphicFrame>
+        <p:nvGraphicFramePr>
+          <p:cNvPr id="5" name="Table 4">
+            <a:extLst>
+              <a:ext uri="{FF2B5EF4-FFF2-40B4-BE49-F238E27FC236}">
+                <a16:creationId xmlns:a16="http://schemas.microsoft.com/office/drawing/2014/main" id="{C42662AA-DCCC-9AF4-9D44-270F4B2C8B11}"/>
+              </a:ext>
+            </a:extLst>
+          </p:cNvPr>
+          <p:cNvGraphicFramePr>
+            <a:graphicFrameLocks noGrp="1"/>
+          </p:cNvGraphicFramePr>
+          <p:nvPr>
+            <p:extLst>
+              <p:ext uri="{D42A27DB-BD31-4B8C-83A1-F6EECF244321}">
+                <p14:modId xmlns:p14="http://schemas.microsoft.com/office/powerpoint/2010/main" val="1524371807"/>
+              </p:ext>
+            </p:extLst>
+          </p:nvPr>
+        </p:nvGraphicFramePr>
+        <p:xfrm>
+          <a:off x="291445" y="2877674"/>
+          <a:ext cx="8296374" cy="1119291"/>
+        </p:xfrm>
+        <a:graphic>
+          <a:graphicData uri="http://schemas.openxmlformats.org/drawingml/2006/table">
+            <a:tbl>
+              <a:tblPr/>
+              <a:tblGrid>
+                <a:gridCol w="962124">
+                  <a:extLst>
+                    <a:ext uri="{9D8B030D-6E8A-4147-A177-3AD203B41FA5}">
+                      <a16:colId xmlns:a16="http://schemas.microsoft.com/office/drawing/2014/main" val="3442980969"/>
+                    </a:ext>
+                  </a:extLst>
+                </a:gridCol>
+                <a:gridCol w="7334250">
+                  <a:extLst>
+                    <a:ext uri="{9D8B030D-6E8A-4147-A177-3AD203B41FA5}">
+                      <a16:colId xmlns:a16="http://schemas.microsoft.com/office/drawing/2014/main" val="2156703607"/>
+                    </a:ext>
+                  </a:extLst>
+                </a:gridCol>
+              </a:tblGrid>
+              <a:tr h="373097">
+                <a:tc>
+                  <a:txBody>
+                    <a:bodyPr/>
+                    <a:lstStyle/>
+                    <a:p>
+                      <a:r>
+                        <a:rPr lang="en-US" sz="1400"/>
+                        <a:t>Şərt</a:t>
+                      </a:r>
+                    </a:p>
+                  </a:txBody>
+                  <a:tcPr anchor="ctr">
+                    <a:lnL w="12700" cap="flat" cmpd="sng" algn="ctr">
+                      <a:solidFill>
+                        <a:schemeClr val="tx1"/>
+                      </a:solidFill>
+                      <a:prstDash val="solid"/>
+                      <a:round/>
+                      <a:headEnd type="none" w="med" len="med"/>
+                      <a:tailEnd type="none" w="med" len="med"/>
+                    </a:lnL>
+                    <a:lnR w="12700" cap="flat" cmpd="sng" algn="ctr">
+                      <a:solidFill>
+                        <a:schemeClr val="tx1"/>
+                      </a:solidFill>
+                      <a:prstDash val="solid"/>
+                      <a:round/>
+                      <a:headEnd type="none" w="med" len="med"/>
+                      <a:tailEnd type="none" w="med" len="med"/>
+                    </a:lnR>
+                    <a:lnT w="12700" cap="flat" cmpd="sng" algn="ctr">
+                      <a:solidFill>
+                        <a:schemeClr val="tx1"/>
+                      </a:solidFill>
+                      <a:prstDash val="solid"/>
+                      <a:round/>
+                      <a:headEnd type="none" w="med" len="med"/>
+                      <a:tailEnd type="none" w="med" len="med"/>
+                    </a:lnT>
+                    <a:lnB w="12700" cap="flat" cmpd="sng" algn="ctr">
+                      <a:solidFill>
+                        <a:schemeClr val="tx1"/>
+                      </a:solidFill>
+                      <a:prstDash val="solid"/>
+                      <a:round/>
+                      <a:headEnd type="none" w="med" len="med"/>
+                      <a:tailEnd type="none" w="med" len="med"/>
+                    </a:lnB>
+                    <a:noFill/>
+                  </a:tcPr>
+                </a:tc>
+                <a:tc>
+                  <a:txBody>
+                    <a:bodyPr/>
+                    <a:lstStyle/>
+                    <a:p>
+                      <a:r>
+                        <a:rPr lang="en-US" sz="1400"/>
+                        <a:t>Əgər auth parametri sorğuda varsa</a:t>
+                      </a:r>
+                      <a:r>
+                        <a:rPr lang="az-Latn-AZ" sz="1400"/>
+                        <a:t>  ( </a:t>
+                      </a:r>
+                      <a:r>
+                        <a:rPr lang="az-Latn-AZ" sz="1400" b="1">
+                          <a:solidFill>
+                            <a:srgbClr val="0070C0"/>
+                          </a:solidFill>
+                        </a:rPr>
+                        <a:t>$request-&gt;has('auth’) </a:t>
+                      </a:r>
+                      <a:r>
+                        <a:rPr lang="az-Latn-AZ" sz="1400"/>
+                        <a:t>)</a:t>
+                      </a:r>
+                      <a:r>
+                        <a:rPr lang="en-US" sz="1400"/>
+                        <a:t> və 1-dirsə</a:t>
+                      </a:r>
+                      <a:r>
+                        <a:rPr lang="az-Latn-AZ" sz="1400"/>
+                        <a:t> ( </a:t>
+                      </a:r>
+                      <a:r>
+                        <a:rPr lang="az-Latn-AZ" sz="1400" b="1">
+                          <a:solidFill>
+                            <a:srgbClr val="0070C0"/>
+                          </a:solidFill>
+                        </a:rPr>
+                        <a:t>$request-&gt;auth == 1 </a:t>
+                      </a:r>
+                      <a:r>
+                        <a:rPr lang="az-Latn-AZ" sz="1400"/>
+                        <a:t>)</a:t>
+                      </a:r>
+                      <a:endParaRPr lang="en-US" sz="1400"/>
+                    </a:p>
+                  </a:txBody>
+                  <a:tcPr anchor="ctr">
+                    <a:lnL w="12700" cap="flat" cmpd="sng" algn="ctr">
+                      <a:solidFill>
+                        <a:schemeClr val="tx1"/>
+                      </a:solidFill>
+                      <a:prstDash val="solid"/>
+                      <a:round/>
+                      <a:headEnd type="none" w="med" len="med"/>
+                      <a:tailEnd type="none" w="med" len="med"/>
+                    </a:lnL>
+                    <a:lnR w="12700" cap="flat" cmpd="sng" algn="ctr">
+                      <a:solidFill>
+                        <a:schemeClr val="tx1"/>
+                      </a:solidFill>
+                      <a:prstDash val="solid"/>
+                      <a:round/>
+                      <a:headEnd type="none" w="med" len="med"/>
+                      <a:tailEnd type="none" w="med" len="med"/>
+                    </a:lnR>
+                    <a:lnT w="12700" cap="flat" cmpd="sng" algn="ctr">
+                      <a:solidFill>
+                        <a:schemeClr val="tx1"/>
+                      </a:solidFill>
+                      <a:prstDash val="solid"/>
+                      <a:round/>
+                      <a:headEnd type="none" w="med" len="med"/>
+                      <a:tailEnd type="none" w="med" len="med"/>
+                    </a:lnT>
+                    <a:lnB w="12700" cap="flat" cmpd="sng" algn="ctr">
+                      <a:solidFill>
+                        <a:schemeClr val="tx1"/>
+                      </a:solidFill>
+                      <a:prstDash val="solid"/>
+                      <a:round/>
+                      <a:headEnd type="none" w="med" len="med"/>
+                      <a:tailEnd type="none" w="med" len="med"/>
+                    </a:lnB>
+                    <a:noFill/>
+                  </a:tcPr>
+                </a:tc>
+                <a:extLst>
+                  <a:ext uri="{0D108BD9-81ED-4DB2-BD59-A6C34878D82A}">
+                    <a16:rowId xmlns:a16="http://schemas.microsoft.com/office/drawing/2014/main" val="547778977"/>
+                  </a:ext>
+                </a:extLst>
+              </a:tr>
+              <a:tr h="373097">
+                <a:tc>
+                  <a:txBody>
+                    <a:bodyPr/>
+                    <a:lstStyle/>
+                    <a:p>
+                      <a:r>
+                        <a:rPr lang="en-US" sz="1400"/>
+                        <a:t>✅</a:t>
+                      </a:r>
+                    </a:p>
+                  </a:txBody>
+                  <a:tcPr anchor="ctr">
+                    <a:lnL w="12700" cap="flat" cmpd="sng" algn="ctr">
+                      <a:solidFill>
+                        <a:schemeClr val="tx1"/>
+                      </a:solidFill>
+                      <a:prstDash val="solid"/>
+                      <a:round/>
+                      <a:headEnd type="none" w="med" len="med"/>
+                      <a:tailEnd type="none" w="med" len="med"/>
+                    </a:lnL>
+                    <a:lnR w="12700" cap="flat" cmpd="sng" algn="ctr">
+                      <a:solidFill>
+                        <a:schemeClr val="tx1"/>
+                      </a:solidFill>
+                      <a:prstDash val="solid"/>
+                      <a:round/>
+                      <a:headEnd type="none" w="med" len="med"/>
+                      <a:tailEnd type="none" w="med" len="med"/>
+                    </a:lnR>
+                    <a:lnT w="12700" cap="flat" cmpd="sng" algn="ctr">
+                      <a:solidFill>
+                        <a:schemeClr val="tx1"/>
+                      </a:solidFill>
+                      <a:prstDash val="solid"/>
+                      <a:round/>
+                      <a:headEnd type="none" w="med" len="med"/>
+                      <a:tailEnd type="none" w="med" len="med"/>
+                    </a:lnT>
+                    <a:lnB w="12700" cap="flat" cmpd="sng" algn="ctr">
+                      <a:solidFill>
+                        <a:schemeClr val="tx1"/>
+                      </a:solidFill>
+                      <a:prstDash val="solid"/>
+                      <a:round/>
+                      <a:headEnd type="none" w="med" len="med"/>
+                      <a:tailEnd type="none" w="med" len="med"/>
+                    </a:lnB>
+                    <a:noFill/>
+                  </a:tcPr>
+                </a:tc>
+                <a:tc>
+                  <a:txBody>
+                    <a:bodyPr/>
+                    <a:lstStyle/>
+                    <a:p>
+                      <a:r>
+                        <a:rPr lang="pt-BR" sz="1400"/>
+                        <a:t>next($request) – Sorğu davam edir</a:t>
+                      </a:r>
+                    </a:p>
+                  </a:txBody>
+                  <a:tcPr anchor="ctr">
+                    <a:lnL w="12700" cap="flat" cmpd="sng" algn="ctr">
+                      <a:solidFill>
+                        <a:schemeClr val="tx1"/>
+                      </a:solidFill>
+                      <a:prstDash val="solid"/>
+                      <a:round/>
+                      <a:headEnd type="none" w="med" len="med"/>
+                      <a:tailEnd type="none" w="med" len="med"/>
+                    </a:lnL>
+                    <a:lnR w="12700" cap="flat" cmpd="sng" algn="ctr">
+                      <a:solidFill>
+                        <a:schemeClr val="tx1"/>
+                      </a:solidFill>
+                      <a:prstDash val="solid"/>
+                      <a:round/>
+                      <a:headEnd type="none" w="med" len="med"/>
+                      <a:tailEnd type="none" w="med" len="med"/>
+                    </a:lnR>
+                    <a:lnT w="12700" cap="flat" cmpd="sng" algn="ctr">
+                      <a:solidFill>
+                        <a:schemeClr val="tx1"/>
+                      </a:solidFill>
+                      <a:prstDash val="solid"/>
+                      <a:round/>
+                      <a:headEnd type="none" w="med" len="med"/>
+                      <a:tailEnd type="none" w="med" len="med"/>
+                    </a:lnT>
+                    <a:lnB w="12700" cap="flat" cmpd="sng" algn="ctr">
+                      <a:solidFill>
+                        <a:schemeClr val="tx1"/>
+                      </a:solidFill>
+                      <a:prstDash val="solid"/>
+                      <a:round/>
+                      <a:headEnd type="none" w="med" len="med"/>
+                      <a:tailEnd type="none" w="med" len="med"/>
+                    </a:lnB>
+                    <a:noFill/>
+                  </a:tcPr>
+                </a:tc>
+                <a:extLst>
+                  <a:ext uri="{0D108BD9-81ED-4DB2-BD59-A6C34878D82A}">
+                    <a16:rowId xmlns:a16="http://schemas.microsoft.com/office/drawing/2014/main" val="990766534"/>
+                  </a:ext>
+                </a:extLst>
+              </a:tr>
+              <a:tr h="373097">
+                <a:tc>
+                  <a:txBody>
+                    <a:bodyPr/>
+                    <a:lstStyle/>
+                    <a:p>
+                      <a:r>
+                        <a:rPr lang="en-US" sz="1400"/>
+                        <a:t>❌</a:t>
+                      </a:r>
+                    </a:p>
+                  </a:txBody>
+                  <a:tcPr anchor="ctr">
+                    <a:lnL w="12700" cap="flat" cmpd="sng" algn="ctr">
+                      <a:solidFill>
+                        <a:schemeClr val="tx1"/>
+                      </a:solidFill>
+                      <a:prstDash val="solid"/>
+                      <a:round/>
+                      <a:headEnd type="none" w="med" len="med"/>
+                      <a:tailEnd type="none" w="med" len="med"/>
+                    </a:lnL>
+                    <a:lnR w="12700" cap="flat" cmpd="sng" algn="ctr">
+                      <a:solidFill>
+                        <a:schemeClr val="tx1"/>
+                      </a:solidFill>
+                      <a:prstDash val="solid"/>
+                      <a:round/>
+                      <a:headEnd type="none" w="med" len="med"/>
+                      <a:tailEnd type="none" w="med" len="med"/>
+                    </a:lnR>
+                    <a:lnT w="12700" cap="flat" cmpd="sng" algn="ctr">
+                      <a:solidFill>
+                        <a:schemeClr val="tx1"/>
+                      </a:solidFill>
+                      <a:prstDash val="solid"/>
+                      <a:round/>
+                      <a:headEnd type="none" w="med" len="med"/>
+                      <a:tailEnd type="none" w="med" len="med"/>
+                    </a:lnT>
+                    <a:lnB w="12700" cap="flat" cmpd="sng" algn="ctr">
+                      <a:solidFill>
+                        <a:schemeClr val="tx1"/>
+                      </a:solidFill>
+                      <a:prstDash val="solid"/>
+                      <a:round/>
+                      <a:headEnd type="none" w="med" len="med"/>
+                      <a:tailEnd type="none" w="med" len="med"/>
+                    </a:lnB>
+                    <a:noFill/>
+                  </a:tcPr>
+                </a:tc>
+                <a:tc>
+                  <a:txBody>
+                    <a:bodyPr/>
+                    <a:lstStyle/>
+                    <a:p>
+                      <a:r>
+                        <a:rPr lang="en-US" sz="1400"/>
+                        <a:t>Redirect to unavailable route</a:t>
+                      </a:r>
+                    </a:p>
+                  </a:txBody>
+                  <a:tcPr anchor="ctr">
+                    <a:lnL w="12700" cap="flat" cmpd="sng" algn="ctr">
+                      <a:solidFill>
+                        <a:schemeClr val="tx1"/>
+                      </a:solidFill>
+                      <a:prstDash val="solid"/>
+                      <a:round/>
+                      <a:headEnd type="none" w="med" len="med"/>
+                      <a:tailEnd type="none" w="med" len="med"/>
+                    </a:lnL>
+                    <a:lnR w="12700" cap="flat" cmpd="sng" algn="ctr">
+                      <a:solidFill>
+                        <a:schemeClr val="tx1"/>
+                      </a:solidFill>
+                      <a:prstDash val="solid"/>
+                      <a:round/>
+                      <a:headEnd type="none" w="med" len="med"/>
+                      <a:tailEnd type="none" w="med" len="med"/>
+                    </a:lnR>
+                    <a:lnT w="12700" cap="flat" cmpd="sng" algn="ctr">
+                      <a:solidFill>
+                        <a:schemeClr val="tx1"/>
+                      </a:solidFill>
+                      <a:prstDash val="solid"/>
+                      <a:round/>
+                      <a:headEnd type="none" w="med" len="med"/>
+                      <a:tailEnd type="none" w="med" len="med"/>
+                    </a:lnT>
+                    <a:lnB w="12700" cap="flat" cmpd="sng" algn="ctr">
+                      <a:solidFill>
+                        <a:schemeClr val="tx1"/>
+                      </a:solidFill>
+                      <a:prstDash val="solid"/>
+                      <a:round/>
+                      <a:headEnd type="none" w="med" len="med"/>
+                      <a:tailEnd type="none" w="med" len="med"/>
+                    </a:lnB>
+                    <a:noFill/>
+                  </a:tcPr>
+                </a:tc>
+                <a:extLst>
+                  <a:ext uri="{0D108BD9-81ED-4DB2-BD59-A6C34878D82A}">
+                    <a16:rowId xmlns:a16="http://schemas.microsoft.com/office/drawing/2014/main" val="1458383505"/>
+                  </a:ext>
+                </a:extLst>
+              </a:tr>
+            </a:tbl>
+          </a:graphicData>
+        </a:graphic>
+      </p:graphicFrame>
+    </p:spTree>
+    <p:extLst>
+      <p:ext uri="{BB962C8B-B14F-4D97-AF65-F5344CB8AC3E}">
+        <p14:creationId xmlns:p14="http://schemas.microsoft.com/office/powerpoint/2010/main" val="882651115"/>
+      </p:ext>
+    </p:extLst>
+  </p:cSld>
+  <p:clrMapOvr>
+    <a:masterClrMapping/>
+  </p:clrMapOvr>
+</p:sld>
+</file>
+
+<file path=ppt/slides/slide7.xml><?xml version="1.0" encoding="utf-8"?>
 <p:sld xmlns:a="http://schemas.openxmlformats.org/drawingml/2006/main" xmlns:r="http://schemas.openxmlformats.org/officeDocument/2006/relationships" xmlns:p="http://schemas.openxmlformats.org/presentationml/2006/main">
   <p:cSld>
     <p:spTree>
@@ -3521,7 +6363,7 @@
         <p:spPr>
           <a:xfrm>
             <a:off x="217714" y="255046"/>
-            <a:ext cx="11756571" cy="355354"/>
+            <a:ext cx="11756571" cy="1555682"/>
           </a:xfrm>
           <a:prstGeom prst="rect">
             <a:avLst/>
@@ -3541,25 +6383,841 @@
               <a:buNone/>
             </a:pPr>
             <a:r>
-              <a:rPr kumimoji="0" lang="en-US" altLang="en-US" sz="1300" b="0" i="0" u="none" strike="noStrike" cap="none" normalizeH="0" baseline="0">
-                <a:ln>
-                  <a:noFill/>
-                </a:ln>
-                <a:solidFill>
-                  <a:schemeClr val="tx1"/>
-                </a:solidFill>
-                <a:effectLst/>
-                <a:latin typeface="Arial" panose="020B0604020202020204" pitchFamily="34" charset="0"/>
-              </a:rPr>
-              <a:t>.</a:t>
-            </a:r>
+              <a:rPr lang="az-Latn-AZ" altLang="en-US" sz="1300">
+                <a:latin typeface="Arial" panose="020B0604020202020204" pitchFamily="34" charset="0"/>
+              </a:rPr>
+              <a:t>Artıq </a:t>
+            </a:r>
+            <a:r>
+              <a:rPr lang="az-Latn-AZ" altLang="en-US" sz="1300" b="1">
+                <a:latin typeface="Arial" panose="020B0604020202020204" pitchFamily="34" charset="0"/>
+              </a:rPr>
+              <a:t>URL</a:t>
+            </a:r>
+            <a:r>
+              <a:rPr lang="az-Latn-AZ" altLang="en-US" sz="1300">
+                <a:latin typeface="Arial" panose="020B0604020202020204" pitchFamily="34" charset="0"/>
+              </a:rPr>
+              <a:t> yerində bir şeylər yazaraq test edək </a:t>
+            </a:r>
+            <a:r>
+              <a:rPr lang="en-US" altLang="en-US" sz="1300" b="1">
+                <a:latin typeface="Arial" panose="020B0604020202020204" pitchFamily="34" charset="0"/>
+              </a:rPr>
+              <a:t>middleware</a:t>
+            </a:r>
+            <a:r>
+              <a:rPr lang="en-US" altLang="en-US" sz="1300">
+                <a:latin typeface="Arial" panose="020B0604020202020204" pitchFamily="34" charset="0"/>
+              </a:rPr>
+              <a:t> </a:t>
+            </a:r>
+            <a:r>
+              <a:rPr lang="az-Latn-AZ" altLang="en-US" sz="1300">
+                <a:latin typeface="Arial" panose="020B0604020202020204" pitchFamily="34" charset="0"/>
+              </a:rPr>
+              <a:t>-in işləyib işləmədiyini: </a:t>
+            </a:r>
+          </a:p>
+          <a:p>
+            <a:pPr>
+              <a:lnSpc>
+                <a:spcPct val="150000"/>
+              </a:lnSpc>
+              <a:buNone/>
+            </a:pPr>
+            <a:endParaRPr kumimoji="0" lang="az-Latn-AZ" altLang="en-US" sz="1300" b="0" i="0" u="none" strike="noStrike" cap="none" normalizeH="0" baseline="0">
+              <a:ln>
+                <a:noFill/>
+              </a:ln>
+              <a:solidFill>
+                <a:schemeClr val="tx1"/>
+              </a:solidFill>
+              <a:effectLst/>
+              <a:latin typeface="Arial" panose="020B0604020202020204" pitchFamily="34" charset="0"/>
+            </a:endParaRPr>
+          </a:p>
+          <a:p>
+            <a:pPr>
+              <a:lnSpc>
+                <a:spcPct val="150000"/>
+              </a:lnSpc>
+              <a:buNone/>
+            </a:pPr>
+            <a:endParaRPr lang="az-Latn-AZ" altLang="en-US" sz="1300">
+              <a:latin typeface="Arial" panose="020B0604020202020204" pitchFamily="34" charset="0"/>
+            </a:endParaRPr>
+          </a:p>
+          <a:p>
+            <a:pPr>
+              <a:lnSpc>
+                <a:spcPct val="150000"/>
+              </a:lnSpc>
+              <a:buNone/>
+            </a:pPr>
+            <a:endParaRPr kumimoji="0" lang="az-Latn-AZ" altLang="en-US" sz="1300" b="0" i="0" u="none" strike="noStrike" cap="none" normalizeH="0" baseline="0">
+              <a:ln>
+                <a:noFill/>
+              </a:ln>
+              <a:solidFill>
+                <a:schemeClr val="tx1"/>
+              </a:solidFill>
+              <a:effectLst/>
+              <a:latin typeface="Arial" panose="020B0604020202020204" pitchFamily="34" charset="0"/>
+            </a:endParaRPr>
+          </a:p>
+          <a:p>
+            <a:pPr>
+              <a:lnSpc>
+                <a:spcPct val="150000"/>
+              </a:lnSpc>
+              <a:buNone/>
+            </a:pPr>
+            <a:r>
+              <a:rPr lang="az-Latn-AZ" altLang="en-US" sz="1300">
+                <a:latin typeface="Arial" panose="020B0604020202020204" pitchFamily="34" charset="0"/>
+              </a:rPr>
+              <a:t>1) Bizdə mövcud olmayan URL yazdıqda 404 Not Found səhifəsi yüklənir</a:t>
+            </a:r>
+            <a:endParaRPr kumimoji="0" lang="en-US" altLang="en-US" sz="1300" b="0" i="0" u="none" strike="noStrike" cap="none" normalizeH="0" baseline="0">
+              <a:ln>
+                <a:noFill/>
+              </a:ln>
+              <a:solidFill>
+                <a:schemeClr val="tx1"/>
+              </a:solidFill>
+              <a:effectLst/>
+              <a:latin typeface="Arial" panose="020B0604020202020204" pitchFamily="34" charset="0"/>
+            </a:endParaRPr>
           </a:p>
         </p:txBody>
       </p:sp>
+      <p:pic>
+        <p:nvPicPr>
+          <p:cNvPr id="4" name="Picture 3">
+            <a:extLst>
+              <a:ext uri="{FF2B5EF4-FFF2-40B4-BE49-F238E27FC236}">
+                <a16:creationId xmlns:a16="http://schemas.microsoft.com/office/drawing/2014/main" id="{576F7410-0AC8-743B-F55D-FE329663333F}"/>
+              </a:ext>
+            </a:extLst>
+          </p:cNvPr>
+          <p:cNvPicPr>
+            <a:picLocks noChangeAspect="1"/>
+          </p:cNvPicPr>
+          <p:nvPr/>
+        </p:nvPicPr>
+        <p:blipFill>
+          <a:blip r:embed="rId2"/>
+          <a:stretch>
+            <a:fillRect/>
+          </a:stretch>
+        </p:blipFill>
+        <p:spPr>
+          <a:xfrm>
+            <a:off x="217714" y="2157235"/>
+            <a:ext cx="4706007" cy="2543530"/>
+          </a:xfrm>
+          <a:prstGeom prst="rect">
+            <a:avLst/>
+          </a:prstGeom>
+        </p:spPr>
+      </p:pic>
     </p:spTree>
     <p:extLst>
       <p:ext uri="{BB962C8B-B14F-4D97-AF65-F5344CB8AC3E}">
         <p14:creationId xmlns:p14="http://schemas.microsoft.com/office/powerpoint/2010/main" val="3095838342"/>
+      </p:ext>
+    </p:extLst>
+  </p:cSld>
+  <p:clrMapOvr>
+    <a:masterClrMapping/>
+  </p:clrMapOvr>
+</p:sld>
+</file>
+
+<file path=ppt/slides/slide8.xml><?xml version="1.0" encoding="utf-8"?>
+<p:sld xmlns:a="http://schemas.openxmlformats.org/drawingml/2006/main" xmlns:r="http://schemas.openxmlformats.org/officeDocument/2006/relationships" xmlns:p="http://schemas.openxmlformats.org/presentationml/2006/main">
+  <p:cSld>
+    <p:spTree>
+      <p:nvGrpSpPr>
+        <p:cNvPr id="1" name="">
+          <a:extLst>
+            <a:ext uri="{FF2B5EF4-FFF2-40B4-BE49-F238E27FC236}">
+              <a16:creationId xmlns:a16="http://schemas.microsoft.com/office/drawing/2014/main" id="{64F6224E-606F-5B7D-725B-122E0CDEDF30}"/>
+            </a:ext>
+          </a:extLst>
+        </p:cNvPr>
+        <p:cNvGrpSpPr/>
+        <p:nvPr/>
+      </p:nvGrpSpPr>
+      <p:grpSpPr>
+        <a:xfrm>
+          <a:off x="0" y="0"/>
+          <a:ext cx="0" cy="0"/>
+          <a:chOff x="0" y="0"/>
+          <a:chExt cx="0" cy="0"/>
+        </a:xfrm>
+      </p:grpSpPr>
+      <p:sp>
+        <p:nvSpPr>
+          <p:cNvPr id="3" name="TextBox 2">
+            <a:extLst>
+              <a:ext uri="{FF2B5EF4-FFF2-40B4-BE49-F238E27FC236}">
+                <a16:creationId xmlns:a16="http://schemas.microsoft.com/office/drawing/2014/main" id="{88AEC543-7DBB-63A5-F4A3-8929D1AD542F}"/>
+              </a:ext>
+            </a:extLst>
+          </p:cNvPr>
+          <p:cNvSpPr txBox="1"/>
+          <p:nvPr/>
+        </p:nvSpPr>
+        <p:spPr>
+          <a:xfrm>
+            <a:off x="217714" y="255046"/>
+            <a:ext cx="11756571" cy="1855764"/>
+          </a:xfrm>
+          <a:prstGeom prst="rect">
+            <a:avLst/>
+          </a:prstGeom>
+          <a:noFill/>
+        </p:spPr>
+        <p:txBody>
+          <a:bodyPr wrap="square">
+            <a:spAutoFit/>
+          </a:bodyPr>
+          <a:lstStyle/>
+          <a:p>
+            <a:pPr marL="342900" indent="-342900">
+              <a:lnSpc>
+                <a:spcPct val="150000"/>
+              </a:lnSpc>
+              <a:buAutoNum type="arabicParenR"/>
+            </a:pPr>
+            <a:r>
+              <a:rPr lang="az-Latn-AZ" altLang="en-US" sz="1300">
+                <a:latin typeface="Arial" panose="020B0604020202020204" pitchFamily="34" charset="0"/>
+              </a:rPr>
+              <a:t>`</a:t>
+            </a:r>
+            <a:r>
+              <a:rPr lang="az-Latn-AZ" altLang="en-US" sz="1300" b="1">
+                <a:latin typeface="Arial" panose="020B0604020202020204" pitchFamily="34" charset="0"/>
+              </a:rPr>
+              <a:t>Dashboard</a:t>
+            </a:r>
+            <a:r>
+              <a:rPr lang="az-Latn-AZ" altLang="en-US" sz="1300">
+                <a:latin typeface="Arial" panose="020B0604020202020204" pitchFamily="34" charset="0"/>
+              </a:rPr>
+              <a:t>` yaxud `</a:t>
+            </a:r>
+            <a:r>
+              <a:rPr lang="az-Latn-AZ" altLang="en-US" sz="1300" b="1">
+                <a:latin typeface="Arial" panose="020B0604020202020204" pitchFamily="34" charset="0"/>
+              </a:rPr>
+              <a:t>Profile</a:t>
+            </a:r>
+            <a:r>
+              <a:rPr lang="az-Latn-AZ" altLang="en-US" sz="1300">
+                <a:latin typeface="Arial" panose="020B0604020202020204" pitchFamily="34" charset="0"/>
+              </a:rPr>
+              <a:t>` yazdıqda yüklənir: </a:t>
+            </a:r>
+            <a:r>
+              <a:rPr lang="az-Latn-AZ" altLang="en-US" sz="1300" b="1" u="sng">
+                <a:solidFill>
+                  <a:srgbClr val="0070C0"/>
+                </a:solidFill>
+                <a:latin typeface="Arial" panose="020B0604020202020204" pitchFamily="34" charset="0"/>
+              </a:rPr>
+              <a:t>http://vendor-e-commerce.test/dashboard</a:t>
+            </a:r>
+          </a:p>
+          <a:p>
+            <a:pPr marL="342900" indent="-342900">
+              <a:lnSpc>
+                <a:spcPct val="150000"/>
+              </a:lnSpc>
+              <a:buAutoNum type="arabicParenR"/>
+            </a:pPr>
+            <a:endParaRPr kumimoji="0" lang="az-Latn-AZ" altLang="en-US" sz="1300" b="0" i="0" u="none" strike="noStrike" cap="none" normalizeH="0" baseline="0">
+              <a:ln>
+                <a:noFill/>
+              </a:ln>
+              <a:solidFill>
+                <a:schemeClr val="tx1"/>
+              </a:solidFill>
+              <a:effectLst/>
+              <a:latin typeface="Arial" panose="020B0604020202020204" pitchFamily="34" charset="0"/>
+            </a:endParaRPr>
+          </a:p>
+          <a:p>
+            <a:pPr>
+              <a:lnSpc>
+                <a:spcPct val="150000"/>
+              </a:lnSpc>
+            </a:pPr>
+            <a:r>
+              <a:rPr lang="az-Latn-AZ" altLang="en-US" sz="1300">
+                <a:latin typeface="Arial" panose="020B0604020202020204" pitchFamily="34" charset="0"/>
+              </a:rPr>
+              <a:t>`</a:t>
+            </a:r>
+            <a:r>
+              <a:rPr lang="az-Latn-AZ" altLang="en-US" sz="1300" b="1">
+                <a:latin typeface="Arial" panose="020B0604020202020204" pitchFamily="34" charset="0"/>
+              </a:rPr>
+              <a:t>AuthCheck</a:t>
+            </a:r>
+            <a:r>
+              <a:rPr lang="az-Latn-AZ" altLang="en-US" sz="1300">
+                <a:latin typeface="Arial" panose="020B0604020202020204" pitchFamily="34" charset="0"/>
+              </a:rPr>
+              <a:t>` adlı </a:t>
+            </a:r>
+            <a:r>
+              <a:rPr lang="en-US" altLang="en-US" sz="1300">
+                <a:latin typeface="Arial" panose="020B0604020202020204" pitchFamily="34" charset="0"/>
+              </a:rPr>
+              <a:t>middleware </a:t>
+            </a:r>
+            <a:r>
+              <a:rPr lang="az-Latn-AZ" altLang="en-US" sz="1300" b="1">
+                <a:latin typeface="Arial" panose="020B0604020202020204" pitchFamily="34" charset="0"/>
+              </a:rPr>
+              <a:t>URL</a:t>
+            </a:r>
+            <a:r>
+              <a:rPr lang="az-Latn-AZ" altLang="en-US" sz="1300">
+                <a:latin typeface="Arial" panose="020B0604020202020204" pitchFamily="34" charset="0"/>
+              </a:rPr>
+              <a:t> dən gələn sorğunun </a:t>
+            </a:r>
+            <a:r>
+              <a:rPr lang="az-Latn-AZ" altLang="en-US" sz="1300" b="1">
+                <a:latin typeface="Arial" panose="020B0604020202020204" pitchFamily="34" charset="0"/>
+              </a:rPr>
+              <a:t>auth</a:t>
+            </a:r>
+            <a:r>
+              <a:rPr lang="az-Latn-AZ" altLang="en-US" sz="1300">
+                <a:latin typeface="Arial" panose="020B0604020202020204" pitchFamily="34" charset="0"/>
+              </a:rPr>
+              <a:t> adlı </a:t>
+            </a:r>
+            <a:r>
+              <a:rPr lang="az-Latn-AZ" altLang="en-US" sz="1300" b="1">
+                <a:latin typeface="Arial" panose="020B0604020202020204" pitchFamily="34" charset="0"/>
+              </a:rPr>
+              <a:t>parametrə</a:t>
+            </a:r>
+            <a:r>
+              <a:rPr lang="az-Latn-AZ" altLang="en-US" sz="1300">
+                <a:latin typeface="Arial" panose="020B0604020202020204" pitchFamily="34" charset="0"/>
+              </a:rPr>
+              <a:t> və </a:t>
+            </a:r>
+            <a:r>
+              <a:rPr lang="az-Latn-AZ" altLang="en-US" sz="1300" b="1">
+                <a:latin typeface="Arial" panose="020B0604020202020204" pitchFamily="34" charset="0"/>
+              </a:rPr>
+              <a:t>dəyərinin</a:t>
+            </a:r>
+            <a:r>
+              <a:rPr lang="az-Latn-AZ" altLang="en-US" sz="1300">
+                <a:latin typeface="Arial" panose="020B0604020202020204" pitchFamily="34" charset="0"/>
+              </a:rPr>
+              <a:t> </a:t>
+            </a:r>
+            <a:r>
+              <a:rPr lang="az-Latn-AZ" altLang="en-US" sz="1300" b="1">
+                <a:latin typeface="Arial" panose="020B0604020202020204" pitchFamily="34" charset="0"/>
+              </a:rPr>
+              <a:t>1</a:t>
+            </a:r>
+            <a:r>
+              <a:rPr lang="az-Latn-AZ" altLang="en-US" sz="1300">
+                <a:latin typeface="Arial" panose="020B0604020202020204" pitchFamily="34" charset="0"/>
+              </a:rPr>
+              <a:t> olub olmadığını yoxlayır. Əgər belə bir şey yoxdursa onda </a:t>
+            </a:r>
+            <a:r>
+              <a:rPr lang="az-Latn-AZ" altLang="en-US" sz="1300" b="1">
+                <a:latin typeface="Arial" panose="020B0604020202020204" pitchFamily="34" charset="0"/>
+              </a:rPr>
+              <a:t>redirect</a:t>
+            </a:r>
+            <a:r>
+              <a:rPr lang="az-Latn-AZ" altLang="en-US" sz="1300">
+                <a:latin typeface="Arial" panose="020B0604020202020204" pitchFamily="34" charset="0"/>
+              </a:rPr>
+              <a:t> oluruq </a:t>
+            </a:r>
+            <a:r>
+              <a:rPr lang="en-US" altLang="en-US" sz="1300" b="1">
+                <a:solidFill>
+                  <a:srgbClr val="0070C0"/>
+                </a:solidFill>
+                <a:latin typeface="Arial" panose="020B0604020202020204" pitchFamily="34" charset="0"/>
+              </a:rPr>
+              <a:t>/</a:t>
+            </a:r>
+            <a:r>
+              <a:rPr lang="az-Latn-AZ" altLang="en-US" sz="1300" b="1">
+                <a:solidFill>
+                  <a:srgbClr val="0070C0"/>
+                </a:solidFill>
+                <a:latin typeface="Arial" panose="020B0604020202020204" pitchFamily="34" charset="0"/>
+              </a:rPr>
+              <a:t>unavailable </a:t>
+            </a:r>
+            <a:r>
+              <a:rPr lang="az-Latn-AZ" altLang="en-US" sz="1300">
+                <a:latin typeface="Arial" panose="020B0604020202020204" pitchFamily="34" charset="0"/>
+              </a:rPr>
+              <a:t>səhifəsinə. </a:t>
+            </a:r>
+          </a:p>
+          <a:p>
+            <a:pPr>
+              <a:lnSpc>
+                <a:spcPct val="150000"/>
+              </a:lnSpc>
+            </a:pPr>
+            <a:endParaRPr kumimoji="0" lang="az-Latn-AZ" altLang="en-US" sz="1300" b="0" i="0" u="none" strike="noStrike" cap="none" normalizeH="0" baseline="0">
+              <a:ln>
+                <a:noFill/>
+              </a:ln>
+              <a:solidFill>
+                <a:schemeClr val="tx1"/>
+              </a:solidFill>
+              <a:effectLst/>
+              <a:latin typeface="Arial" panose="020B0604020202020204" pitchFamily="34" charset="0"/>
+            </a:endParaRPr>
+          </a:p>
+          <a:p>
+            <a:pPr>
+              <a:lnSpc>
+                <a:spcPct val="150000"/>
+              </a:lnSpc>
+            </a:pPr>
+            <a:r>
+              <a:rPr lang="az-Latn-AZ" altLang="en-US" sz="1300">
+                <a:latin typeface="Arial" panose="020B0604020202020204" pitchFamily="34" charset="0"/>
+              </a:rPr>
+              <a:t>Əks halda bu səhifələr (şablon) yüklənəcək.</a:t>
+            </a:r>
+            <a:endParaRPr kumimoji="0" lang="en-US" altLang="en-US" sz="1300" b="0" i="0" u="none" strike="noStrike" cap="none" normalizeH="0" baseline="0">
+              <a:ln>
+                <a:noFill/>
+              </a:ln>
+              <a:solidFill>
+                <a:schemeClr val="tx1"/>
+              </a:solidFill>
+              <a:effectLst/>
+              <a:latin typeface="Arial" panose="020B0604020202020204" pitchFamily="34" charset="0"/>
+            </a:endParaRPr>
+          </a:p>
+        </p:txBody>
+      </p:sp>
+      <p:pic>
+        <p:nvPicPr>
+          <p:cNvPr id="4" name="Picture 3">
+            <a:extLst>
+              <a:ext uri="{FF2B5EF4-FFF2-40B4-BE49-F238E27FC236}">
+                <a16:creationId xmlns:a16="http://schemas.microsoft.com/office/drawing/2014/main" id="{ED25473E-8663-5AD9-EFB2-A72BA8C9F905}"/>
+              </a:ext>
+            </a:extLst>
+          </p:cNvPr>
+          <p:cNvPicPr>
+            <a:picLocks noChangeAspect="1"/>
+          </p:cNvPicPr>
+          <p:nvPr/>
+        </p:nvPicPr>
+        <p:blipFill>
+          <a:blip r:embed="rId2"/>
+          <a:stretch>
+            <a:fillRect/>
+          </a:stretch>
+        </p:blipFill>
+        <p:spPr>
+          <a:xfrm>
+            <a:off x="311983" y="2304575"/>
+            <a:ext cx="3722690" cy="1637732"/>
+          </a:xfrm>
+          <a:prstGeom prst="rect">
+            <a:avLst/>
+          </a:prstGeom>
+          <a:ln w="38100" cap="sq">
+            <a:solidFill>
+              <a:srgbClr val="000000"/>
+            </a:solidFill>
+            <a:prstDash val="solid"/>
+            <a:miter lim="800000"/>
+          </a:ln>
+          <a:effectLst>
+            <a:outerShdw blurRad="50800" dist="38100" dir="2700000" algn="tl" rotWithShape="0">
+              <a:srgbClr val="000000">
+                <a:alpha val="43000"/>
+              </a:srgbClr>
+            </a:outerShdw>
+          </a:effectLst>
+        </p:spPr>
+      </p:pic>
+      <p:pic>
+        <p:nvPicPr>
+          <p:cNvPr id="6" name="Picture 5">
+            <a:extLst>
+              <a:ext uri="{FF2B5EF4-FFF2-40B4-BE49-F238E27FC236}">
+                <a16:creationId xmlns:a16="http://schemas.microsoft.com/office/drawing/2014/main" id="{2B063804-881E-80D7-665B-1355C5B057BD}"/>
+              </a:ext>
+            </a:extLst>
+          </p:cNvPr>
+          <p:cNvPicPr>
+            <a:picLocks noChangeAspect="1"/>
+          </p:cNvPicPr>
+          <p:nvPr/>
+        </p:nvPicPr>
+        <p:blipFill>
+          <a:blip r:embed="rId3"/>
+          <a:stretch>
+            <a:fillRect/>
+          </a:stretch>
+        </p:blipFill>
+        <p:spPr>
+          <a:xfrm>
+            <a:off x="311983" y="4553425"/>
+            <a:ext cx="5325218" cy="2229161"/>
+          </a:xfrm>
+          <a:prstGeom prst="rect">
+            <a:avLst/>
+          </a:prstGeom>
+          <a:ln w="38100" cap="sq">
+            <a:solidFill>
+              <a:srgbClr val="000000"/>
+            </a:solidFill>
+            <a:prstDash val="solid"/>
+            <a:miter lim="800000"/>
+          </a:ln>
+          <a:effectLst>
+            <a:outerShdw blurRad="50800" dist="38100" dir="2700000" algn="tl" rotWithShape="0">
+              <a:srgbClr val="000000">
+                <a:alpha val="43000"/>
+              </a:srgbClr>
+            </a:outerShdw>
+          </a:effectLst>
+        </p:spPr>
+      </p:pic>
+    </p:spTree>
+    <p:extLst>
+      <p:ext uri="{BB962C8B-B14F-4D97-AF65-F5344CB8AC3E}">
+        <p14:creationId xmlns:p14="http://schemas.microsoft.com/office/powerpoint/2010/main" val="3700814633"/>
+      </p:ext>
+    </p:extLst>
+  </p:cSld>
+  <p:clrMapOvr>
+    <a:masterClrMapping/>
+  </p:clrMapOvr>
+</p:sld>
+</file>
+
+<file path=ppt/slides/slide9.xml><?xml version="1.0" encoding="utf-8"?>
+<p:sld xmlns:a="http://schemas.openxmlformats.org/drawingml/2006/main" xmlns:r="http://schemas.openxmlformats.org/officeDocument/2006/relationships" xmlns:p="http://schemas.openxmlformats.org/presentationml/2006/main">
+  <p:cSld>
+    <p:spTree>
+      <p:nvGrpSpPr>
+        <p:cNvPr id="1" name="">
+          <a:extLst>
+            <a:ext uri="{FF2B5EF4-FFF2-40B4-BE49-F238E27FC236}">
+              <a16:creationId xmlns:a16="http://schemas.microsoft.com/office/drawing/2014/main" id="{C008BFDF-1D92-EFA7-736A-B965750CBC71}"/>
+            </a:ext>
+          </a:extLst>
+        </p:cNvPr>
+        <p:cNvGrpSpPr/>
+        <p:nvPr/>
+      </p:nvGrpSpPr>
+      <p:grpSpPr>
+        <a:xfrm>
+          <a:off x="0" y="0"/>
+          <a:ext cx="0" cy="0"/>
+          <a:chOff x="0" y="0"/>
+          <a:chExt cx="0" cy="0"/>
+        </a:xfrm>
+      </p:grpSpPr>
+      <p:sp>
+        <p:nvSpPr>
+          <p:cNvPr id="3" name="TextBox 2">
+            <a:extLst>
+              <a:ext uri="{FF2B5EF4-FFF2-40B4-BE49-F238E27FC236}">
+                <a16:creationId xmlns:a16="http://schemas.microsoft.com/office/drawing/2014/main" id="{275E5E12-6EBD-183A-A3B9-32F6D03C92D1}"/>
+              </a:ext>
+            </a:extLst>
+          </p:cNvPr>
+          <p:cNvSpPr txBox="1"/>
+          <p:nvPr/>
+        </p:nvSpPr>
+        <p:spPr>
+          <a:xfrm>
+            <a:off x="217714" y="255046"/>
+            <a:ext cx="11756571" cy="2092304"/>
+          </a:xfrm>
+          <a:prstGeom prst="rect">
+            <a:avLst/>
+          </a:prstGeom>
+          <a:noFill/>
+        </p:spPr>
+        <p:txBody>
+          <a:bodyPr wrap="square">
+            <a:spAutoFit/>
+          </a:bodyPr>
+          <a:lstStyle/>
+          <a:p>
+            <a:pPr>
+              <a:lnSpc>
+                <a:spcPct val="150000"/>
+              </a:lnSpc>
+              <a:buNone/>
+            </a:pPr>
+            <a:r>
+              <a:rPr lang="az-Latn-AZ" altLang="en-US" sz="1100">
+                <a:latin typeface="Arial" panose="020B0604020202020204" pitchFamily="34" charset="0"/>
+              </a:rPr>
+              <a:t>Yerdə qalan digər route -lar da, hər zaman normal yükləndiyi kimi yüklənməyə dəvam edəcək.</a:t>
+            </a:r>
+            <a:endParaRPr lang="en-US" altLang="en-US" sz="1100">
+              <a:latin typeface="Arial" panose="020B0604020202020204" pitchFamily="34" charset="0"/>
+            </a:endParaRPr>
+          </a:p>
+          <a:p>
+            <a:pPr>
+              <a:lnSpc>
+                <a:spcPct val="150000"/>
+              </a:lnSpc>
+              <a:buNone/>
+            </a:pPr>
+            <a:endParaRPr kumimoji="0" lang="en-US" altLang="en-US" sz="1100" b="0" i="0" u="none" strike="noStrike" cap="none" normalizeH="0" baseline="0">
+              <a:ln>
+                <a:noFill/>
+              </a:ln>
+              <a:solidFill>
+                <a:schemeClr val="tx1"/>
+              </a:solidFill>
+              <a:effectLst/>
+              <a:latin typeface="Arial" panose="020B0604020202020204" pitchFamily="34" charset="0"/>
+            </a:endParaRPr>
+          </a:p>
+          <a:p>
+            <a:pPr>
+              <a:lnSpc>
+                <a:spcPct val="150000"/>
+              </a:lnSpc>
+              <a:buNone/>
+            </a:pPr>
+            <a:r>
+              <a:rPr lang="az-Latn-AZ" altLang="en-US" sz="1100" b="1">
+                <a:latin typeface="Arial" panose="020B0604020202020204" pitchFamily="34" charset="0"/>
+              </a:rPr>
+              <a:t>Və hətta URL yerində</a:t>
+            </a:r>
+            <a:r>
+              <a:rPr lang="az-Latn-AZ" altLang="en-US" sz="1100">
+                <a:latin typeface="Arial" panose="020B0604020202020204" pitchFamily="34" charset="0"/>
+              </a:rPr>
+              <a:t>: </a:t>
+            </a:r>
+          </a:p>
+          <a:p>
+            <a:pPr>
+              <a:lnSpc>
+                <a:spcPct val="150000"/>
+              </a:lnSpc>
+              <a:buNone/>
+            </a:pPr>
+            <a:r>
+              <a:rPr kumimoji="0" lang="az-Latn-AZ" altLang="en-US" sz="1100" b="0" i="0" u="none" strike="noStrike" cap="none" normalizeH="0" baseline="0">
+                <a:ln>
+                  <a:noFill/>
+                </a:ln>
+                <a:solidFill>
+                  <a:schemeClr val="tx1"/>
+                </a:solidFill>
+                <a:effectLst/>
+                <a:latin typeface="Arial" panose="020B0604020202020204" pitchFamily="34" charset="0"/>
+              </a:rPr>
+              <a:t>	http://vendor-e-commerce.test/posts?auth=1</a:t>
+            </a:r>
+          </a:p>
+          <a:p>
+            <a:pPr>
+              <a:lnSpc>
+                <a:spcPct val="150000"/>
+              </a:lnSpc>
+              <a:buNone/>
+            </a:pPr>
+            <a:r>
+              <a:rPr kumimoji="0" lang="az-Latn-AZ" altLang="en-US" sz="1100" b="0" i="0" u="none" strike="noStrike" cap="none" normalizeH="0" baseline="0">
+                <a:ln>
+                  <a:noFill/>
+                </a:ln>
+                <a:solidFill>
+                  <a:schemeClr val="tx1"/>
+                </a:solidFill>
+                <a:effectLst/>
+                <a:latin typeface="Arial" panose="020B0604020202020204" pitchFamily="34" charset="0"/>
+              </a:rPr>
+              <a:t>	http://vendor-e-commerce.test/posts?test=1</a:t>
+            </a:r>
+          </a:p>
+          <a:p>
+            <a:pPr>
+              <a:lnSpc>
+                <a:spcPct val="150000"/>
+              </a:lnSpc>
+              <a:buNone/>
+            </a:pPr>
+            <a:r>
+              <a:rPr lang="az-Latn-AZ" altLang="en-US" sz="1100">
+                <a:latin typeface="Arial" panose="020B0604020202020204" pitchFamily="34" charset="0"/>
+              </a:rPr>
+              <a:t>	</a:t>
+            </a:r>
+            <a:r>
+              <a:rPr kumimoji="0" lang="az-Latn-AZ" altLang="en-US" sz="1100" b="0" i="0" u="none" strike="noStrike" cap="none" normalizeH="0" baseline="0">
+                <a:ln>
+                  <a:noFill/>
+                </a:ln>
+                <a:solidFill>
+                  <a:schemeClr val="tx1"/>
+                </a:solidFill>
+                <a:effectLst/>
+                <a:latin typeface="Arial" panose="020B0604020202020204" pitchFamily="34" charset="0"/>
+              </a:rPr>
+              <a:t>http://vendor-e-commerce.test/posts?mmmmm=17         və.s yazmağın fərqi olmadan yüklənir yerdə qalan həmin bu route -lar.</a:t>
+            </a:r>
+          </a:p>
+          <a:p>
+            <a:pPr>
+              <a:lnSpc>
+                <a:spcPct val="150000"/>
+              </a:lnSpc>
+              <a:buNone/>
+            </a:pPr>
+            <a:endParaRPr kumimoji="0" lang="az-Latn-AZ" altLang="en-US" sz="1100" b="0" i="0" u="none" strike="noStrike" cap="none" normalizeH="0" baseline="0">
+              <a:ln>
+                <a:noFill/>
+              </a:ln>
+              <a:solidFill>
+                <a:schemeClr val="tx1"/>
+              </a:solidFill>
+              <a:effectLst/>
+              <a:latin typeface="Arial" panose="020B0604020202020204" pitchFamily="34" charset="0"/>
+            </a:endParaRPr>
+          </a:p>
+          <a:p>
+            <a:pPr>
+              <a:lnSpc>
+                <a:spcPct val="150000"/>
+              </a:lnSpc>
+              <a:buNone/>
+            </a:pPr>
+            <a:r>
+              <a:rPr lang="az-Latn-AZ" altLang="en-US" sz="1100">
+                <a:latin typeface="Arial" panose="020B0604020202020204" pitchFamily="34" charset="0"/>
+              </a:rPr>
+              <a:t>Çünki burada yazılan </a:t>
+            </a:r>
+            <a:r>
+              <a:rPr lang="az-Latn-AZ" altLang="en-US" sz="1100" b="1">
+                <a:latin typeface="Arial" panose="020B0604020202020204" pitchFamily="34" charset="0"/>
+              </a:rPr>
+              <a:t>AUTH</a:t>
+            </a:r>
+            <a:r>
+              <a:rPr lang="az-Latn-AZ" altLang="en-US" sz="1100">
+                <a:latin typeface="Arial" panose="020B0604020202020204" pitchFamily="34" charset="0"/>
+              </a:rPr>
+              <a:t> parametrinin `</a:t>
+            </a:r>
+            <a:r>
+              <a:rPr lang="az-Latn-AZ" altLang="en-US" sz="1100" b="1">
+                <a:latin typeface="Arial" panose="020B0604020202020204" pitchFamily="34" charset="0"/>
+              </a:rPr>
+              <a:t>AuthCheck</a:t>
+            </a:r>
+            <a:r>
+              <a:rPr lang="az-Latn-AZ" altLang="en-US" sz="1100">
+                <a:latin typeface="Arial" panose="020B0604020202020204" pitchFamily="34" charset="0"/>
+              </a:rPr>
+              <a:t>` </a:t>
+            </a:r>
+            <a:r>
+              <a:rPr lang="en-US" altLang="en-US" sz="1100" b="1">
+                <a:latin typeface="Arial" panose="020B0604020202020204" pitchFamily="34" charset="0"/>
+              </a:rPr>
+              <a:t>middleware</a:t>
+            </a:r>
+            <a:r>
+              <a:rPr lang="en-US" altLang="en-US" sz="1100">
+                <a:latin typeface="Arial" panose="020B0604020202020204" pitchFamily="34" charset="0"/>
+              </a:rPr>
+              <a:t> il</a:t>
+            </a:r>
+            <a:r>
+              <a:rPr lang="az-Latn-AZ" altLang="en-US" sz="1100">
+                <a:latin typeface="Arial" panose="020B0604020202020204" pitchFamily="34" charset="0"/>
+              </a:rPr>
+              <a:t>ə heç bir əlaqəsi yoxdur.</a:t>
+            </a:r>
+          </a:p>
+        </p:txBody>
+      </p:sp>
+      <p:pic>
+        <p:nvPicPr>
+          <p:cNvPr id="4" name="Picture 3">
+            <a:extLst>
+              <a:ext uri="{FF2B5EF4-FFF2-40B4-BE49-F238E27FC236}">
+                <a16:creationId xmlns:a16="http://schemas.microsoft.com/office/drawing/2014/main" id="{4B04B7BE-027B-4ACE-2247-379417590F8C}"/>
+              </a:ext>
+            </a:extLst>
+          </p:cNvPr>
+          <p:cNvPicPr>
+            <a:picLocks noChangeAspect="1"/>
+          </p:cNvPicPr>
+          <p:nvPr/>
+        </p:nvPicPr>
+        <p:blipFill>
+          <a:blip r:embed="rId2"/>
+          <a:stretch>
+            <a:fillRect/>
+          </a:stretch>
+        </p:blipFill>
+        <p:spPr>
+          <a:xfrm>
+            <a:off x="318280" y="2600104"/>
+            <a:ext cx="11555438" cy="4172532"/>
+          </a:xfrm>
+          <a:prstGeom prst="rect">
+            <a:avLst/>
+          </a:prstGeom>
+          <a:ln w="38100" cap="sq">
+            <a:solidFill>
+              <a:srgbClr val="000000"/>
+            </a:solidFill>
+            <a:prstDash val="solid"/>
+            <a:miter lim="800000"/>
+          </a:ln>
+          <a:effectLst>
+            <a:outerShdw blurRad="50800" dist="38100" dir="2700000" algn="tl" rotWithShape="0">
+              <a:srgbClr val="000000">
+                <a:alpha val="43000"/>
+              </a:srgbClr>
+            </a:outerShdw>
+          </a:effectLst>
+        </p:spPr>
+      </p:pic>
+    </p:spTree>
+    <p:extLst>
+      <p:ext uri="{BB962C8B-B14F-4D97-AF65-F5344CB8AC3E}">
+        <p14:creationId xmlns:p14="http://schemas.microsoft.com/office/powerpoint/2010/main" val="295367552"/>
       </p:ext>
     </p:extLst>
   </p:cSld>
